--- a/PPC_National_App_Presentation.pptx
+++ b/PPC_National_App_Presentation.pptx
@@ -14,6 +14,7 @@
     <p:sldId id="262" r:id="rId13"/>
     <p:sldId id="263" r:id="rId14"/>
     <p:sldId id="264" r:id="rId15"/>
+    <p:sldId id="273" r:id="rId24"/>
     <p:sldId id="265" r:id="rId16"/>
     <p:sldId id="266" r:id="rId17"/>
     <p:sldId id="267" r:id="rId18"/>
@@ -3571,7 +3572,7 @@
                   <a:srgbClr val="FFFFFF"/>
                 </a:solidFill>
               </a:rPr>
-              <a:t>Districts &amp; National Board</a:t>
+              <a:t>Districts &amp; National Boards</a:t>
             </a:r>
           </a:p>
         </p:txBody>
@@ -3632,78 +3633,93 @@
           </a:bodyPr>
           <a:lstStyle/>
           <a:p>
-            <a:pPr>
-              <a:spcBef>
-                <a:spcPts val="400"/>
-              </a:spcBef>
-            </a:pPr>
-            <a:r>
-              <a:rPr sz="1300">
+            <a:r>
+              <a:rPr sz="1200">
                 <a:solidFill>
                   <a:srgbClr val="555F7A"/>
                 </a:solidFill>
               </a:rPr>
-              <a:t>• Southern Cape — 10 congregations</a:t>
-            </a:r>
-          </a:p>
-          <a:p>
-            <a:pPr>
-              <a:spcBef>
-                <a:spcPts val="400"/>
-              </a:spcBef>
-            </a:pPr>
-            <a:r>
-              <a:rPr sz="1300">
+              <a:t>• Boland — 12 congregations</a:t>
+            </a:r>
+          </a:p>
+          <a:p>
+            <a:r>
+              <a:rPr sz="1200">
                 <a:solidFill>
                   <a:srgbClr val="555F7A"/>
                 </a:solidFill>
               </a:rPr>
-              <a:t>• Garden Route — 10 congregations</a:t>
-            </a:r>
-          </a:p>
-          <a:p>
-            <a:pPr>
-              <a:spcBef>
-                <a:spcPts val="400"/>
-              </a:spcBef>
-            </a:pPr>
-            <a:r>
-              <a:rPr sz="1300">
+              <a:t>• Southern Cape — 11 congregations</a:t>
+            </a:r>
+          </a:p>
+          <a:p>
+            <a:r>
+              <a:rPr sz="1200">
                 <a:solidFill>
                   <a:srgbClr val="555F7A"/>
                 </a:solidFill>
               </a:rPr>
-              <a:t>• Eden District — 9 congregations</a:t>
-            </a:r>
-          </a:p>
-          <a:p>
-            <a:pPr>
-              <a:spcBef>
-                <a:spcPts val="400"/>
-              </a:spcBef>
-            </a:pPr>
-            <a:r>
-              <a:rPr sz="1300">
+              <a:t>• Central Cape — 10 congregations</a:t>
+            </a:r>
+          </a:p>
+          <a:p>
+            <a:r>
+              <a:rPr sz="1200">
                 <a:solidFill>
                   <a:srgbClr val="555F7A"/>
                 </a:solidFill>
               </a:rPr>
-              <a:t>• Central Cape — 3 congregations</a:t>
-            </a:r>
-          </a:p>
-          <a:p>
-            <a:pPr>
-              <a:spcBef>
-                <a:spcPts val="400"/>
-              </a:spcBef>
-            </a:pPr>
-            <a:r>
-              <a:rPr sz="1300">
+              <a:t>• Eastern Cape — 9 congregations</a:t>
+            </a:r>
+          </a:p>
+          <a:p>
+            <a:r>
+              <a:rPr sz="1200">
                 <a:solidFill>
                   <a:srgbClr val="555F7A"/>
                 </a:solidFill>
               </a:rPr>
-              <a:t>• Northern Cape, Free State, Gauteng, West Coast, Eastern Cape</a:t>
+              <a:t>• Eden — 9 congregations</a:t>
+            </a:r>
+          </a:p>
+          <a:p>
+            <a:r>
+              <a:rPr sz="1200">
+                <a:solidFill>
+                  <a:srgbClr val="555F7A"/>
+                </a:solidFill>
+              </a:rPr>
+              <a:t>• Garden Route — 9 congregations</a:t>
+            </a:r>
+          </a:p>
+          <a:p>
+            <a:r>
+              <a:rPr sz="1200">
+                <a:solidFill>
+                  <a:srgbClr val="555F7A"/>
+                </a:solidFill>
+              </a:rPr>
+              <a:t>• Gauteng — 8 congregations</a:t>
+            </a:r>
+          </a:p>
+          <a:p>
+            <a:r>
+              <a:rPr sz="1200">
+                <a:solidFill>
+                  <a:srgbClr val="555F7A"/>
+                </a:solidFill>
+              </a:rPr>
+              <a:t>• Free State — 7 congregations</a:t>
+            </a:r>
+          </a:p>
+          <a:p>
+            <a:r>
+              <a:rPr sz="1200">
+                <a:solidFill>
+                  <a:srgbClr val="555F7A"/>
+                </a:solidFill>
+              </a:rPr>
+              <a:t>• Northern Cape — 6 congregations</a:t>
             </a:r>
           </a:p>
         </p:txBody>
@@ -3858,7 +3874,7 @@
                   <a:srgbClr val="C9A03C"/>
                 </a:solidFill>
               </a:rPr>
-              <a:t>National Board</a:t>
+              <a:t>National &amp; Women’s Boards</a:t>
             </a:r>
           </a:p>
         </p:txBody>
@@ -3885,78 +3901,63 @@
           </a:bodyPr>
           <a:lstStyle/>
           <a:p>
-            <a:pPr>
-              <a:spcBef>
-                <a:spcPts val="400"/>
-              </a:spcBef>
-            </a:pPr>
-            <a:r>
-              <a:rPr sz="1400">
+            <a:r>
+              <a:rPr sz="1350">
                 <a:solidFill>
                   <a:srgbClr val="CCD6FF"/>
                 </a:solidFill>
               </a:rPr>
-              <a:t>  Leadership profiles with photos</a:t>
-            </a:r>
-          </a:p>
-          <a:p>
-            <a:pPr>
-              <a:spcBef>
-                <a:spcPts val="400"/>
-              </a:spcBef>
-            </a:pPr>
-            <a:r>
-              <a:rPr sz="1400">
+              <a:t>  Two boards: National Board (8 leaders) and</a:t>
+            </a:r>
+          </a:p>
+          <a:p>
+            <a:r>
+              <a:rPr sz="1350">
                 <a:solidFill>
                   <a:srgbClr val="CCD6FF"/>
                 </a:solidFill>
               </a:rPr>
+              <a:t>  National Women’s Board (4 leaders)</a:t>
+            </a:r>
+          </a:p>
+          <a:p>
+            <a:r>
+              <a:rPr sz="1350">
+                <a:solidFill>
+                  <a:srgbClr val="CCD6FF"/>
+                </a:solidFill>
+              </a:rPr>
+              <a:t>  Real photos for every leader</a:t>
+            </a:r>
+          </a:p>
+          <a:p>
+            <a:r>
+              <a:rPr sz="1350">
+                <a:solidFill>
+                  <a:srgbClr val="CCD6FF"/>
+                </a:solidFill>
+              </a:rPr>
+              <a:t>  Tap any photo to see the full picture</a:t>
+            </a:r>
+          </a:p>
+          <a:p>
+            <a:r>
+              <a:rPr sz="1350">
+                <a:solidFill>
+                  <a:srgbClr val="CCD6FF"/>
+                </a:solidFill>
+              </a:rPr>
               <a:t>  Title and role clearly displayed</a:t>
             </a:r>
           </a:p>
           <a:p>
-            <a:pPr>
-              <a:spcBef>
-                <a:spcPts val="400"/>
-              </a:spcBef>
-            </a:pPr>
-            <a:r>
-              <a:rPr sz="1400">
+            <a:r>
+              <a:rPr sz="1350">
                 <a:solidFill>
                   <a:srgbClr val="CCD6FF"/>
                 </a:solidFill>
               </a:rPr>
-              <a:t>  Accessible to all members</a:t>
-            </a:r>
-          </a:p>
-          <a:p>
-            <a:pPr>
-              <a:spcBef>
-                <a:spcPts val="400"/>
-              </a:spcBef>
-            </a:pPr>
-            <a:r>
-              <a:rPr sz="1400">
-                <a:solidFill>
-                  <a:srgbClr val="CCD6FF"/>
-                </a:solidFill>
-              </a:rPr>
-              <a:t>  Updated by Admin in real-time</a:t>
-            </a:r>
-          </a:p>
-          <a:p>
-            <a:pPr>
-              <a:spcBef>
-                <a:spcPts val="400"/>
-              </a:spcBef>
-            </a:pPr>
-            <a:r>
-              <a:rPr sz="1400">
-                <a:solidFill>
-                  <a:srgbClr val="CCD6FF"/>
-                </a:solidFill>
-              </a:rPr>
-              <a:t>  Encourages transparency and trust</a:t>
+              <a:t>  Accessible to all members, updated by Admin</a:t>
             </a:r>
           </a:p>
         </p:txBody>
@@ -5528,8 +5529,7 @@
                   <a:srgbClr val="CCD6FF"/>
                 </a:solidFill>
               </a:rPr>
-              <a:t>Single codebase runs on iOS and Android.
-Expo managed workflow for fast builds &amp; OTA updates.</a:t>
+              <a:t>Single codebase runs on iOS and Android. Expo managed workflow for fast builds &amp; OTA updates — already in active use to ship JS/UI changes to testers instantly, no app-store resubmission needed.</a:t>
             </a:r>
           </a:p>
         </p:txBody>
@@ -9557,14 +9557,48 @@
       </p:sp>
       <p:sp>
         <p:nvSpPr>
-          <p:cNvPr id="6" name="Rectangle 5"/>
+          <p:cNvPr id="46" name="TextBox 45"/>
+          <p:cNvSpPr txBox="1"/>
+          <p:nvPr/>
+        </p:nvSpPr>
+        <p:spPr>
+          <a:xfrm>
+            <a:off x="274320" y="6629400"/>
+            <a:ext cx="5486400" cy="201168"/>
+          </a:xfrm>
+          <a:prstGeom prst="rect">
+            <a:avLst/>
+          </a:prstGeom>
+          <a:noFill/>
+        </p:spPr>
+        <p:txBody>
+          <a:bodyPr wrap="square">
+            <a:spAutoFit/>
+          </a:bodyPr>
+          <a:lstStyle/>
+          <a:p>
+            <a:pPr algn="l"/>
+            <a:r>
+              <a:rPr sz="800" b="0" i="1">
+                <a:solidFill>
+                  <a:srgbClr val="888888"/>
+                </a:solidFill>
+              </a:rPr>
+              <a:t>Developed by Prayburn Links</a:t>
+            </a:r>
+          </a:p>
+        </p:txBody>
+      </p:sp>
+      <p:sp>
+        <p:nvSpPr>
+          <p:cNvPr id="47" name="Rectangle 46"/>
           <p:cNvSpPr/>
           <p:nvPr/>
         </p:nvSpPr>
         <p:spPr>
           <a:xfrm>
             <a:off x="365760" y="1280160"/>
-            <a:ext cx="457200" cy="457200"/>
+            <a:ext cx="384048" cy="384048"/>
           </a:xfrm>
           <a:prstGeom prst="rect">
             <a:avLst/>
@@ -9575,6 +9609,7 @@
           <a:ln>
             <a:noFill/>
           </a:ln>
+          <a:effectLst/>
         </p:spPr>
         <p:style>
           <a:lnRef idx="1">
@@ -9600,29 +9635,29 @@
       </p:sp>
       <p:sp>
         <p:nvSpPr>
-          <p:cNvPr id="7" name="TextBox 6"/>
-          <p:cNvSpPr txBox="1"/>
-          <p:nvPr/>
-        </p:nvSpPr>
-        <p:spPr>
-          <a:xfrm>
-            <a:off x="365760" y="1280160"/>
-            <a:ext cx="457200" cy="457200"/>
-          </a:xfrm>
-          <a:prstGeom prst="rect">
-            <a:avLst/>
-          </a:prstGeom>
-          <a:noFill/>
-        </p:spPr>
-        <p:txBody>
-          <a:bodyPr wrap="square">
-            <a:spAutoFit/>
-          </a:bodyPr>
-          <a:lstStyle/>
-          <a:p>
-            <a:pPr algn="ctr"/>
-            <a:r>
-              <a:rPr sz="1600" b="0" i="0">
+          <p:cNvPr id="48" name="TextBox 47"/>
+          <p:cNvSpPr txBox="1"/>
+          <p:nvPr/>
+        </p:nvSpPr>
+        <p:spPr>
+          <a:xfrm>
+            <a:off x="365760" y="1298448"/>
+            <a:ext cx="384048" cy="384048"/>
+          </a:xfrm>
+          <a:prstGeom prst="rect">
+            <a:avLst/>
+          </a:prstGeom>
+          <a:noFill/>
+        </p:spPr>
+        <p:txBody>
+          <a:bodyPr wrap="square">
+            <a:spAutoFit/>
+          </a:bodyPr>
+          <a:lstStyle/>
+          <a:p>
+            <a:pPr algn="ctr"/>
+            <a:r>
+              <a:rPr sz="1500" b="0">
                 <a:solidFill>
                   <a:srgbClr val="FFFFFF"/>
                 </a:solidFill>
@@ -9634,14 +9669,14 @@
       </p:sp>
       <p:sp>
         <p:nvSpPr>
-          <p:cNvPr id="8" name="TextBox 7"/>
-          <p:cNvSpPr txBox="1"/>
-          <p:nvPr/>
-        </p:nvSpPr>
-        <p:spPr>
-          <a:xfrm>
-            <a:off x="960120" y="1325880"/>
-            <a:ext cx="2743200" cy="347472"/>
+          <p:cNvPr id="49" name="TextBox 48"/>
+          <p:cNvSpPr txBox="1"/>
+          <p:nvPr/>
+        </p:nvSpPr>
+        <p:spPr>
+          <a:xfrm>
+            <a:off x="868680" y="1280160"/>
+            <a:ext cx="5166360" cy="310896"/>
           </a:xfrm>
           <a:prstGeom prst="rect">
             <a:avLst/>
@@ -9656,7 +9691,7 @@
           <a:p>
             <a:pPr algn="l"/>
             <a:r>
-              <a:rPr sz="1300" b="1" i="0">
+              <a:rPr sz="1300" b="1">
                 <a:solidFill>
                   <a:srgbClr val="1A234E"/>
                 </a:solidFill>
@@ -9668,14 +9703,14 @@
       </p:sp>
       <p:sp>
         <p:nvSpPr>
-          <p:cNvPr id="9" name="TextBox 8"/>
-          <p:cNvSpPr txBox="1"/>
-          <p:nvPr/>
-        </p:nvSpPr>
-        <p:spPr>
-          <a:xfrm>
-            <a:off x="3749039" y="1325880"/>
-            <a:ext cx="7955279" cy="347472"/>
+          <p:cNvPr id="50" name="TextBox 49"/>
+          <p:cNvSpPr txBox="1"/>
+          <p:nvPr/>
+        </p:nvSpPr>
+        <p:spPr>
+          <a:xfrm>
+            <a:off x="868680" y="1591056"/>
+            <a:ext cx="5166360" cy="411480"/>
           </a:xfrm>
           <a:prstGeom prst="rect">
             <a:avLst/>
@@ -9690,7 +9725,7 @@
           <a:p>
             <a:pPr algn="l"/>
             <a:r>
-              <a:rPr sz="1200" b="0" i="0">
+              <a:rPr sz="1050" b="0">
                 <a:solidFill>
                   <a:srgbClr val="555F7A"/>
                 </a:solidFill>
@@ -9702,14 +9737,14 @@
       </p:sp>
       <p:sp>
         <p:nvSpPr>
-          <p:cNvPr id="10" name="Rectangle 9"/>
+          <p:cNvPr id="51" name="Rectangle 50"/>
           <p:cNvSpPr/>
           <p:nvPr/>
         </p:nvSpPr>
         <p:spPr>
           <a:xfrm>
-            <a:off x="365760" y="1801367"/>
-            <a:ext cx="457200" cy="457200"/>
+            <a:off x="6263640" y="1280160"/>
+            <a:ext cx="384048" cy="384048"/>
           </a:xfrm>
           <a:prstGeom prst="rect">
             <a:avLst/>
@@ -9720,6 +9755,7 @@
           <a:ln>
             <a:noFill/>
           </a:ln>
+          <a:effectLst/>
         </p:spPr>
         <p:style>
           <a:lnRef idx="1">
@@ -9745,29 +9781,29 @@
       </p:sp>
       <p:sp>
         <p:nvSpPr>
-          <p:cNvPr id="11" name="TextBox 10"/>
-          <p:cNvSpPr txBox="1"/>
-          <p:nvPr/>
-        </p:nvSpPr>
-        <p:spPr>
-          <a:xfrm>
-            <a:off x="365760" y="1801367"/>
-            <a:ext cx="457200" cy="457200"/>
-          </a:xfrm>
-          <a:prstGeom prst="rect">
-            <a:avLst/>
-          </a:prstGeom>
-          <a:noFill/>
-        </p:spPr>
-        <p:txBody>
-          <a:bodyPr wrap="square">
-            <a:spAutoFit/>
-          </a:bodyPr>
-          <a:lstStyle/>
-          <a:p>
-            <a:pPr algn="ctr"/>
-            <a:r>
-              <a:rPr sz="1600" b="0" i="0">
+          <p:cNvPr id="52" name="TextBox 51"/>
+          <p:cNvSpPr txBox="1"/>
+          <p:nvPr/>
+        </p:nvSpPr>
+        <p:spPr>
+          <a:xfrm>
+            <a:off x="6263640" y="1298448"/>
+            <a:ext cx="384048" cy="384048"/>
+          </a:xfrm>
+          <a:prstGeom prst="rect">
+            <a:avLst/>
+          </a:prstGeom>
+          <a:noFill/>
+        </p:spPr>
+        <p:txBody>
+          <a:bodyPr wrap="square">
+            <a:spAutoFit/>
+          </a:bodyPr>
+          <a:lstStyle/>
+          <a:p>
+            <a:pPr algn="ctr"/>
+            <a:r>
+              <a:rPr sz="1500" b="0">
                 <a:solidFill>
                   <a:srgbClr val="FFFFFF"/>
                 </a:solidFill>
@@ -9779,14 +9815,14 @@
       </p:sp>
       <p:sp>
         <p:nvSpPr>
-          <p:cNvPr id="12" name="TextBox 11"/>
-          <p:cNvSpPr txBox="1"/>
-          <p:nvPr/>
-        </p:nvSpPr>
-        <p:spPr>
-          <a:xfrm>
-            <a:off x="960120" y="1847087"/>
-            <a:ext cx="2743200" cy="347472"/>
+          <p:cNvPr id="53" name="TextBox 52"/>
+          <p:cNvSpPr txBox="1"/>
+          <p:nvPr/>
+        </p:nvSpPr>
+        <p:spPr>
+          <a:xfrm>
+            <a:off x="6766559" y="1280160"/>
+            <a:ext cx="5166360" cy="310896"/>
           </a:xfrm>
           <a:prstGeom prst="rect">
             <a:avLst/>
@@ -9801,26 +9837,26 @@
           <a:p>
             <a:pPr algn="l"/>
             <a:r>
-              <a:rPr sz="1300" b="1" i="0">
+              <a:rPr sz="1300" b="1">
                 <a:solidFill>
                   <a:srgbClr val="1A234E"/>
                 </a:solidFill>
               </a:rPr>
-              <a:t>Events System</a:t>
-            </a:r>
-          </a:p>
-        </p:txBody>
-      </p:sp>
-      <p:sp>
-        <p:nvSpPr>
-          <p:cNvPr id="13" name="TextBox 12"/>
-          <p:cNvSpPr txBox="1"/>
-          <p:nvPr/>
-        </p:nvSpPr>
-        <p:spPr>
-          <a:xfrm>
-            <a:off x="3749039" y="1847087"/>
-            <a:ext cx="7955279" cy="347472"/>
+              <a:t>Events + My Events</a:t>
+            </a:r>
+          </a:p>
+        </p:txBody>
+      </p:sp>
+      <p:sp>
+        <p:nvSpPr>
+          <p:cNvPr id="54" name="TextBox 53"/>
+          <p:cNvSpPr txBox="1"/>
+          <p:nvPr/>
+        </p:nvSpPr>
+        <p:spPr>
+          <a:xfrm>
+            <a:off x="6766559" y="1591056"/>
+            <a:ext cx="5166360" cy="411480"/>
           </a:xfrm>
           <a:prstGeom prst="rect">
             <a:avLst/>
@@ -9835,26 +9871,26 @@
           <a:p>
             <a:pPr algn="l"/>
             <a:r>
-              <a:rPr sz="1200" b="0" i="0">
+              <a:rPr sz="1050" b="0">
                 <a:solidFill>
                   <a:srgbClr val="555F7A"/>
                 </a:solidFill>
               </a:rPr>
-              <a:t>Creation, registration, POP upload working</a:t>
-            </a:r>
-          </a:p>
-        </p:txBody>
-      </p:sp>
-      <p:sp>
-        <p:nvSpPr>
-          <p:cNvPr id="14" name="Rectangle 13"/>
+              <a:t>Registration, POP upload, personal history</a:t>
+            </a:r>
+          </a:p>
+        </p:txBody>
+      </p:sp>
+      <p:sp>
+        <p:nvSpPr>
+          <p:cNvPr id="55" name="Rectangle 54"/>
           <p:cNvSpPr/>
           <p:nvPr/>
         </p:nvSpPr>
         <p:spPr>
           <a:xfrm>
-            <a:off x="365760" y="2322576"/>
-            <a:ext cx="457200" cy="457200"/>
+            <a:off x="365760" y="2057400"/>
+            <a:ext cx="384048" cy="384048"/>
           </a:xfrm>
           <a:prstGeom prst="rect">
             <a:avLst/>
@@ -9865,6 +9901,7 @@
           <a:ln>
             <a:noFill/>
           </a:ln>
+          <a:effectLst/>
         </p:spPr>
         <p:style>
           <a:lnRef idx="1">
@@ -9890,29 +9927,29 @@
       </p:sp>
       <p:sp>
         <p:nvSpPr>
-          <p:cNvPr id="15" name="TextBox 14"/>
-          <p:cNvSpPr txBox="1"/>
-          <p:nvPr/>
-        </p:nvSpPr>
-        <p:spPr>
-          <a:xfrm>
-            <a:off x="365760" y="2322576"/>
-            <a:ext cx="457200" cy="457200"/>
-          </a:xfrm>
-          <a:prstGeom prst="rect">
-            <a:avLst/>
-          </a:prstGeom>
-          <a:noFill/>
-        </p:spPr>
-        <p:txBody>
-          <a:bodyPr wrap="square">
-            <a:spAutoFit/>
-          </a:bodyPr>
-          <a:lstStyle/>
-          <a:p>
-            <a:pPr algn="ctr"/>
-            <a:r>
-              <a:rPr sz="1600" b="0" i="0">
+          <p:cNvPr id="56" name="TextBox 55"/>
+          <p:cNvSpPr txBox="1"/>
+          <p:nvPr/>
+        </p:nvSpPr>
+        <p:spPr>
+          <a:xfrm>
+            <a:off x="365760" y="2075688"/>
+            <a:ext cx="384048" cy="384048"/>
+          </a:xfrm>
+          <a:prstGeom prst="rect">
+            <a:avLst/>
+          </a:prstGeom>
+          <a:noFill/>
+        </p:spPr>
+        <p:txBody>
+          <a:bodyPr wrap="square">
+            <a:spAutoFit/>
+          </a:bodyPr>
+          <a:lstStyle/>
+          <a:p>
+            <a:pPr algn="ctr"/>
+            <a:r>
+              <a:rPr sz="1500" b="0">
                 <a:solidFill>
                   <a:srgbClr val="FFFFFF"/>
                 </a:solidFill>
@@ -9924,14 +9961,14 @@
       </p:sp>
       <p:sp>
         <p:nvSpPr>
-          <p:cNvPr id="16" name="TextBox 15"/>
-          <p:cNvSpPr txBox="1"/>
-          <p:nvPr/>
-        </p:nvSpPr>
-        <p:spPr>
-          <a:xfrm>
-            <a:off x="960120" y="2368296"/>
-            <a:ext cx="2743200" cy="347472"/>
+          <p:cNvPr id="57" name="TextBox 56"/>
+          <p:cNvSpPr txBox="1"/>
+          <p:nvPr/>
+        </p:nvSpPr>
+        <p:spPr>
+          <a:xfrm>
+            <a:off x="868680" y="2057400"/>
+            <a:ext cx="5166360" cy="310896"/>
           </a:xfrm>
           <a:prstGeom prst="rect">
             <a:avLst/>
@@ -9946,26 +9983,26 @@
           <a:p>
             <a:pPr algn="l"/>
             <a:r>
-              <a:rPr sz="1300" b="1" i="0">
+              <a:rPr sz="1300" b="1">
                 <a:solidFill>
                   <a:srgbClr val="1A234E"/>
                 </a:solidFill>
               </a:rPr>
-              <a:t>Giving Screen</a:t>
-            </a:r>
-          </a:p>
-        </p:txBody>
-      </p:sp>
-      <p:sp>
-        <p:nvSpPr>
-          <p:cNvPr id="17" name="TextBox 16"/>
-          <p:cNvSpPr txBox="1"/>
-          <p:nvPr/>
-        </p:nvSpPr>
-        <p:spPr>
-          <a:xfrm>
-            <a:off x="3749039" y="2368296"/>
-            <a:ext cx="7955279" cy="347472"/>
+              <a:t>Giving + History</a:t>
+            </a:r>
+          </a:p>
+        </p:txBody>
+      </p:sp>
+      <p:sp>
+        <p:nvSpPr>
+          <p:cNvPr id="58" name="TextBox 57"/>
+          <p:cNvSpPr txBox="1"/>
+          <p:nvPr/>
+        </p:nvSpPr>
+        <p:spPr>
+          <a:xfrm>
+            <a:off x="868680" y="2368296"/>
+            <a:ext cx="5166360" cy="411480"/>
           </a:xfrm>
           <a:prstGeom prst="rect">
             <a:avLst/>
@@ -9980,26 +10017,26 @@
           <a:p>
             <a:pPr algn="l"/>
             <a:r>
-              <a:rPr sz="1200" b="0" i="0">
+              <a:rPr sz="1050" b="0">
                 <a:solidFill>
                   <a:srgbClr val="555F7A"/>
                 </a:solidFill>
               </a:rPr>
-              <a:t>All 6 funds, amounts, bank details live</a:t>
-            </a:r>
-          </a:p>
-        </p:txBody>
-      </p:sp>
-      <p:sp>
-        <p:nvSpPr>
-          <p:cNvPr id="18" name="Rectangle 17"/>
+              <a:t>All 6 funds, amounts, bank details, personal history</a:t>
+            </a:r>
+          </a:p>
+        </p:txBody>
+      </p:sp>
+      <p:sp>
+        <p:nvSpPr>
+          <p:cNvPr id="59" name="Rectangle 58"/>
           <p:cNvSpPr/>
           <p:nvPr/>
         </p:nvSpPr>
         <p:spPr>
           <a:xfrm>
-            <a:off x="365760" y="2843784"/>
-            <a:ext cx="457200" cy="457200"/>
+            <a:off x="6263640" y="2057400"/>
+            <a:ext cx="384048" cy="384048"/>
           </a:xfrm>
           <a:prstGeom prst="rect">
             <a:avLst/>
@@ -10010,6 +10047,7 @@
           <a:ln>
             <a:noFill/>
           </a:ln>
+          <a:effectLst/>
         </p:spPr>
         <p:style>
           <a:lnRef idx="1">
@@ -10035,29 +10073,29 @@
       </p:sp>
       <p:sp>
         <p:nvSpPr>
-          <p:cNvPr id="19" name="TextBox 18"/>
-          <p:cNvSpPr txBox="1"/>
-          <p:nvPr/>
-        </p:nvSpPr>
-        <p:spPr>
-          <a:xfrm>
-            <a:off x="365760" y="2843784"/>
-            <a:ext cx="457200" cy="457200"/>
-          </a:xfrm>
-          <a:prstGeom prst="rect">
-            <a:avLst/>
-          </a:prstGeom>
-          <a:noFill/>
-        </p:spPr>
-        <p:txBody>
-          <a:bodyPr wrap="square">
-            <a:spAutoFit/>
-          </a:bodyPr>
-          <a:lstStyle/>
-          <a:p>
-            <a:pPr algn="ctr"/>
-            <a:r>
-              <a:rPr sz="1600" b="0" i="0">
+          <p:cNvPr id="60" name="TextBox 59"/>
+          <p:cNvSpPr txBox="1"/>
+          <p:nvPr/>
+        </p:nvSpPr>
+        <p:spPr>
+          <a:xfrm>
+            <a:off x="6263640" y="2075688"/>
+            <a:ext cx="384048" cy="384048"/>
+          </a:xfrm>
+          <a:prstGeom prst="rect">
+            <a:avLst/>
+          </a:prstGeom>
+          <a:noFill/>
+        </p:spPr>
+        <p:txBody>
+          <a:bodyPr wrap="square">
+            <a:spAutoFit/>
+          </a:bodyPr>
+          <a:lstStyle/>
+          <a:p>
+            <a:pPr algn="ctr"/>
+            <a:r>
+              <a:rPr sz="1500" b="0">
                 <a:solidFill>
                   <a:srgbClr val="FFFFFF"/>
                 </a:solidFill>
@@ -10069,14 +10107,14 @@
       </p:sp>
       <p:sp>
         <p:nvSpPr>
-          <p:cNvPr id="20" name="TextBox 19"/>
-          <p:cNvSpPr txBox="1"/>
-          <p:nvPr/>
-        </p:nvSpPr>
-        <p:spPr>
-          <a:xfrm>
-            <a:off x="960120" y="2889504"/>
-            <a:ext cx="2743200" cy="347472"/>
+          <p:cNvPr id="61" name="TextBox 60"/>
+          <p:cNvSpPr txBox="1"/>
+          <p:nvPr/>
+        </p:nvSpPr>
+        <p:spPr>
+          <a:xfrm>
+            <a:off x="6766559" y="2057400"/>
+            <a:ext cx="5166360" cy="310896"/>
           </a:xfrm>
           <a:prstGeom prst="rect">
             <a:avLst/>
@@ -10091,26 +10129,26 @@
           <a:p>
             <a:pPr algn="l"/>
             <a:r>
-              <a:rPr sz="1300" b="1" i="0">
+              <a:rPr sz="1300" b="1">
                 <a:solidFill>
                   <a:srgbClr val="1A234E"/>
                 </a:solidFill>
               </a:rPr>
-              <a:t>Prayer Wall</a:t>
-            </a:r>
-          </a:p>
-        </p:txBody>
-      </p:sp>
-      <p:sp>
-        <p:nvSpPr>
-          <p:cNvPr id="21" name="TextBox 20"/>
-          <p:cNvSpPr txBox="1"/>
-          <p:nvPr/>
-        </p:nvSpPr>
-        <p:spPr>
-          <a:xfrm>
-            <a:off x="3749039" y="2889504"/>
-            <a:ext cx="7955279" cy="347472"/>
+              <a:t>Prayer Wall + Mine</a:t>
+            </a:r>
+          </a:p>
+        </p:txBody>
+      </p:sp>
+      <p:sp>
+        <p:nvSpPr>
+          <p:cNvPr id="62" name="TextBox 61"/>
+          <p:cNvSpPr txBox="1"/>
+          <p:nvPr/>
+        </p:nvSpPr>
+        <p:spPr>
+          <a:xfrm>
+            <a:off x="6766559" y="2368296"/>
+            <a:ext cx="5166360" cy="411480"/>
           </a:xfrm>
           <a:prstGeom prst="rect">
             <a:avLst/>
@@ -10125,26 +10163,26 @@
           <a:p>
             <a:pPr algn="l"/>
             <a:r>
-              <a:rPr sz="1200" b="0" i="0">
+              <a:rPr sz="1050" b="0">
                 <a:solidFill>
                   <a:srgbClr val="555F7A"/>
                 </a:solidFill>
               </a:rPr>
-              <a:t>Submit, pray, national/district scoping</a:t>
-            </a:r>
-          </a:p>
-        </p:txBody>
-      </p:sp>
-      <p:sp>
-        <p:nvSpPr>
-          <p:cNvPr id="22" name="Rectangle 21"/>
+              <a:t>Submit, pray, national/district scoping, personal history</a:t>
+            </a:r>
+          </a:p>
+        </p:txBody>
+      </p:sp>
+      <p:sp>
+        <p:nvSpPr>
+          <p:cNvPr id="63" name="Rectangle 62"/>
           <p:cNvSpPr/>
           <p:nvPr/>
         </p:nvSpPr>
         <p:spPr>
           <a:xfrm>
-            <a:off x="365760" y="3364991"/>
-            <a:ext cx="457200" cy="457200"/>
+            <a:off x="365760" y="2834639"/>
+            <a:ext cx="384048" cy="384048"/>
           </a:xfrm>
           <a:prstGeom prst="rect">
             <a:avLst/>
@@ -10155,6 +10193,7 @@
           <a:ln>
             <a:noFill/>
           </a:ln>
+          <a:effectLst/>
         </p:spPr>
         <p:style>
           <a:lnRef idx="1">
@@ -10180,29 +10219,29 @@
       </p:sp>
       <p:sp>
         <p:nvSpPr>
-          <p:cNvPr id="23" name="TextBox 22"/>
-          <p:cNvSpPr txBox="1"/>
-          <p:nvPr/>
-        </p:nvSpPr>
-        <p:spPr>
-          <a:xfrm>
-            <a:off x="365760" y="3364991"/>
-            <a:ext cx="457200" cy="457200"/>
-          </a:xfrm>
-          <a:prstGeom prst="rect">
-            <a:avLst/>
-          </a:prstGeom>
-          <a:noFill/>
-        </p:spPr>
-        <p:txBody>
-          <a:bodyPr wrap="square">
-            <a:spAutoFit/>
-          </a:bodyPr>
-          <a:lstStyle/>
-          <a:p>
-            <a:pPr algn="ctr"/>
-            <a:r>
-              <a:rPr sz="1600" b="0" i="0">
+          <p:cNvPr id="64" name="TextBox 63"/>
+          <p:cNvSpPr txBox="1"/>
+          <p:nvPr/>
+        </p:nvSpPr>
+        <p:spPr>
+          <a:xfrm>
+            <a:off x="365760" y="2852927"/>
+            <a:ext cx="384048" cy="384048"/>
+          </a:xfrm>
+          <a:prstGeom prst="rect">
+            <a:avLst/>
+          </a:prstGeom>
+          <a:noFill/>
+        </p:spPr>
+        <p:txBody>
+          <a:bodyPr wrap="square">
+            <a:spAutoFit/>
+          </a:bodyPr>
+          <a:lstStyle/>
+          <a:p>
+            <a:pPr algn="ctr"/>
+            <a:r>
+              <a:rPr sz="1500" b="0">
                 <a:solidFill>
                   <a:srgbClr val="FFFFFF"/>
                 </a:solidFill>
@@ -10214,14 +10253,14 @@
       </p:sp>
       <p:sp>
         <p:nvSpPr>
-          <p:cNvPr id="24" name="TextBox 23"/>
-          <p:cNvSpPr txBox="1"/>
-          <p:nvPr/>
-        </p:nvSpPr>
-        <p:spPr>
-          <a:xfrm>
-            <a:off x="960120" y="3410711"/>
-            <a:ext cx="2743200" cy="347472"/>
+          <p:cNvPr id="65" name="TextBox 64"/>
+          <p:cNvSpPr txBox="1"/>
+          <p:nvPr/>
+        </p:nvSpPr>
+        <p:spPr>
+          <a:xfrm>
+            <a:off x="868680" y="2834639"/>
+            <a:ext cx="5166360" cy="310896"/>
           </a:xfrm>
           <a:prstGeom prst="rect">
             <a:avLst/>
@@ -10236,7 +10275,7 @@
           <a:p>
             <a:pPr algn="l"/>
             <a:r>
-              <a:rPr sz="1300" b="1" i="0">
+              <a:rPr sz="1300" b="1">
                 <a:solidFill>
                   <a:srgbClr val="1A234E"/>
                 </a:solidFill>
@@ -10248,14 +10287,14 @@
       </p:sp>
       <p:sp>
         <p:nvSpPr>
-          <p:cNvPr id="25" name="TextBox 24"/>
-          <p:cNvSpPr txBox="1"/>
-          <p:nvPr/>
-        </p:nvSpPr>
-        <p:spPr>
-          <a:xfrm>
-            <a:off x="3749039" y="3410711"/>
-            <a:ext cx="7955279" cy="347472"/>
+          <p:cNvPr id="66" name="TextBox 65"/>
+          <p:cNvSpPr txBox="1"/>
+          <p:nvPr/>
+        </p:nvSpPr>
+        <p:spPr>
+          <a:xfrm>
+            <a:off x="868680" y="3145535"/>
+            <a:ext cx="5166360" cy="411480"/>
           </a:xfrm>
           <a:prstGeom prst="rect">
             <a:avLst/>
@@ -10270,7 +10309,7 @@
           <a:p>
             <a:pPr algn="l"/>
             <a:r>
-              <a:rPr sz="1200" b="0" i="0">
+              <a:rPr sz="1050" b="0">
                 <a:solidFill>
                   <a:srgbClr val="555F7A"/>
                 </a:solidFill>
@@ -10282,14 +10321,14 @@
       </p:sp>
       <p:sp>
         <p:nvSpPr>
-          <p:cNvPr id="26" name="Rectangle 25"/>
+          <p:cNvPr id="67" name="Rectangle 66"/>
           <p:cNvSpPr/>
           <p:nvPr/>
         </p:nvSpPr>
         <p:spPr>
           <a:xfrm>
-            <a:off x="365760" y="3886200"/>
-            <a:ext cx="457200" cy="457200"/>
+            <a:off x="6263640" y="2834639"/>
+            <a:ext cx="384048" cy="384048"/>
           </a:xfrm>
           <a:prstGeom prst="rect">
             <a:avLst/>
@@ -10300,6 +10339,7 @@
           <a:ln>
             <a:noFill/>
           </a:ln>
+          <a:effectLst/>
         </p:spPr>
         <p:style>
           <a:lnRef idx="1">
@@ -10325,29 +10365,29 @@
       </p:sp>
       <p:sp>
         <p:nvSpPr>
-          <p:cNvPr id="27" name="TextBox 26"/>
-          <p:cNvSpPr txBox="1"/>
-          <p:nvPr/>
-        </p:nvSpPr>
-        <p:spPr>
-          <a:xfrm>
-            <a:off x="365760" y="3886200"/>
-            <a:ext cx="457200" cy="457200"/>
-          </a:xfrm>
-          <a:prstGeom prst="rect">
-            <a:avLst/>
-          </a:prstGeom>
-          <a:noFill/>
-        </p:spPr>
-        <p:txBody>
-          <a:bodyPr wrap="square">
-            <a:spAutoFit/>
-          </a:bodyPr>
-          <a:lstStyle/>
-          <a:p>
-            <a:pPr algn="ctr"/>
-            <a:r>
-              <a:rPr sz="1600" b="0" i="0">
+          <p:cNvPr id="68" name="TextBox 67"/>
+          <p:cNvSpPr txBox="1"/>
+          <p:nvPr/>
+        </p:nvSpPr>
+        <p:spPr>
+          <a:xfrm>
+            <a:off x="6263640" y="2852927"/>
+            <a:ext cx="384048" cy="384048"/>
+          </a:xfrm>
+          <a:prstGeom prst="rect">
+            <a:avLst/>
+          </a:prstGeom>
+          <a:noFill/>
+        </p:spPr>
+        <p:txBody>
+          <a:bodyPr wrap="square">
+            <a:spAutoFit/>
+          </a:bodyPr>
+          <a:lstStyle/>
+          <a:p>
+            <a:pPr algn="ctr"/>
+            <a:r>
+              <a:rPr sz="1500" b="0">
                 <a:solidFill>
                   <a:srgbClr val="FFFFFF"/>
                 </a:solidFill>
@@ -10359,14 +10399,14 @@
       </p:sp>
       <p:sp>
         <p:nvSpPr>
-          <p:cNvPr id="28" name="TextBox 27"/>
-          <p:cNvSpPr txBox="1"/>
-          <p:nvPr/>
-        </p:nvSpPr>
-        <p:spPr>
-          <a:xfrm>
-            <a:off x="960120" y="3931920"/>
-            <a:ext cx="2743200" cy="347472"/>
+          <p:cNvPr id="69" name="TextBox 68"/>
+          <p:cNvSpPr txBox="1"/>
+          <p:nvPr/>
+        </p:nvSpPr>
+        <p:spPr>
+          <a:xfrm>
+            <a:off x="6766559" y="2834639"/>
+            <a:ext cx="5166360" cy="310896"/>
           </a:xfrm>
           <a:prstGeom prst="rect">
             <a:avLst/>
@@ -10381,26 +10421,26 @@
           <a:p>
             <a:pPr algn="l"/>
             <a:r>
-              <a:rPr sz="1300" b="1" i="0">
+              <a:rPr sz="1300" b="1">
                 <a:solidFill>
                   <a:srgbClr val="1A234E"/>
                 </a:solidFill>
               </a:rPr>
-              <a:t>Districts &amp; Board</a:t>
-            </a:r>
-          </a:p>
-        </p:txBody>
-      </p:sp>
-      <p:sp>
-        <p:nvSpPr>
-          <p:cNvPr id="29" name="TextBox 28"/>
-          <p:cNvSpPr txBox="1"/>
-          <p:nvPr/>
-        </p:nvSpPr>
-        <p:spPr>
-          <a:xfrm>
-            <a:off x="3749039" y="3931920"/>
-            <a:ext cx="7955279" cy="347472"/>
+              <a:t>Districts &amp; Boards</a:t>
+            </a:r>
+          </a:p>
+        </p:txBody>
+      </p:sp>
+      <p:sp>
+        <p:nvSpPr>
+          <p:cNvPr id="70" name="TextBox 69"/>
+          <p:cNvSpPr txBox="1"/>
+          <p:nvPr/>
+        </p:nvSpPr>
+        <p:spPr>
+          <a:xfrm>
+            <a:off x="6766559" y="3145535"/>
+            <a:ext cx="5166360" cy="411480"/>
           </a:xfrm>
           <a:prstGeom prst="rect">
             <a:avLst/>
@@ -10415,26 +10455,26 @@
           <a:p>
             <a:pPr algn="l"/>
             <a:r>
-              <a:rPr sz="1200" b="0" i="0">
+              <a:rPr sz="1050" b="0">
                 <a:solidFill>
                   <a:srgbClr val="555F7A"/>
                 </a:solidFill>
               </a:rPr>
-              <a:t>All 9 districts + National Board profiles</a:t>
-            </a:r>
-          </a:p>
-        </p:txBody>
-      </p:sp>
-      <p:sp>
-        <p:nvSpPr>
-          <p:cNvPr id="30" name="Rectangle 29"/>
+              <a:t>All 9 districts + National &amp; Women’s Board profiles</a:t>
+            </a:r>
+          </a:p>
+        </p:txBody>
+      </p:sp>
+      <p:sp>
+        <p:nvSpPr>
+          <p:cNvPr id="71" name="Rectangle 70"/>
           <p:cNvSpPr/>
           <p:nvPr/>
         </p:nvSpPr>
         <p:spPr>
           <a:xfrm>
-            <a:off x="365760" y="4407408"/>
-            <a:ext cx="457200" cy="457200"/>
+            <a:off x="365760" y="3611879"/>
+            <a:ext cx="384048" cy="384048"/>
           </a:xfrm>
           <a:prstGeom prst="rect">
             <a:avLst/>
@@ -10445,6 +10485,7 @@
           <a:ln>
             <a:noFill/>
           </a:ln>
+          <a:effectLst/>
         </p:spPr>
         <p:style>
           <a:lnRef idx="1">
@@ -10470,29 +10511,29 @@
       </p:sp>
       <p:sp>
         <p:nvSpPr>
-          <p:cNvPr id="31" name="TextBox 30"/>
-          <p:cNvSpPr txBox="1"/>
-          <p:nvPr/>
-        </p:nvSpPr>
-        <p:spPr>
-          <a:xfrm>
-            <a:off x="365760" y="4407408"/>
-            <a:ext cx="457200" cy="457200"/>
-          </a:xfrm>
-          <a:prstGeom prst="rect">
-            <a:avLst/>
-          </a:prstGeom>
-          <a:noFill/>
-        </p:spPr>
-        <p:txBody>
-          <a:bodyPr wrap="square">
-            <a:spAutoFit/>
-          </a:bodyPr>
-          <a:lstStyle/>
-          <a:p>
-            <a:pPr algn="ctr"/>
-            <a:r>
-              <a:rPr sz="1600" b="0" i="0">
+          <p:cNvPr id="72" name="TextBox 71"/>
+          <p:cNvSpPr txBox="1"/>
+          <p:nvPr/>
+        </p:nvSpPr>
+        <p:spPr>
+          <a:xfrm>
+            <a:off x="365760" y="3630168"/>
+            <a:ext cx="384048" cy="384048"/>
+          </a:xfrm>
+          <a:prstGeom prst="rect">
+            <a:avLst/>
+          </a:prstGeom>
+          <a:noFill/>
+        </p:spPr>
+        <p:txBody>
+          <a:bodyPr wrap="square">
+            <a:spAutoFit/>
+          </a:bodyPr>
+          <a:lstStyle/>
+          <a:p>
+            <a:pPr algn="ctr"/>
+            <a:r>
+              <a:rPr sz="1500" b="0">
                 <a:solidFill>
                   <a:srgbClr val="FFFFFF"/>
                 </a:solidFill>
@@ -10504,14 +10545,14 @@
       </p:sp>
       <p:sp>
         <p:nvSpPr>
-          <p:cNvPr id="32" name="TextBox 31"/>
-          <p:cNvSpPr txBox="1"/>
-          <p:nvPr/>
-        </p:nvSpPr>
-        <p:spPr>
-          <a:xfrm>
-            <a:off x="960120" y="4453128"/>
-            <a:ext cx="2743200" cy="347472"/>
+          <p:cNvPr id="73" name="TextBox 72"/>
+          <p:cNvSpPr txBox="1"/>
+          <p:nvPr/>
+        </p:nvSpPr>
+        <p:spPr>
+          <a:xfrm>
+            <a:off x="868680" y="3611879"/>
+            <a:ext cx="5166360" cy="310896"/>
           </a:xfrm>
           <a:prstGeom prst="rect">
             <a:avLst/>
@@ -10526,26 +10567,26 @@
           <a:p>
             <a:pPr algn="l"/>
             <a:r>
-              <a:rPr sz="1300" b="1" i="0">
+              <a:rPr sz="1300" b="1">
                 <a:solidFill>
                   <a:srgbClr val="1A234E"/>
                 </a:solidFill>
               </a:rPr>
-              <a:t>Documents</a:t>
-            </a:r>
-          </a:p>
-        </p:txBody>
-      </p:sp>
-      <p:sp>
-        <p:nvSpPr>
-          <p:cNvPr id="33" name="TextBox 32"/>
-          <p:cNvSpPr txBox="1"/>
-          <p:nvPr/>
-        </p:nvSpPr>
-        <p:spPr>
-          <a:xfrm>
-            <a:off x="3749039" y="4453128"/>
-            <a:ext cx="7955279" cy="347472"/>
+              <a:t>Church Store + My Orders</a:t>
+            </a:r>
+          </a:p>
+        </p:txBody>
+      </p:sp>
+      <p:sp>
+        <p:nvSpPr>
+          <p:cNvPr id="74" name="TextBox 73"/>
+          <p:cNvSpPr txBox="1"/>
+          <p:nvPr/>
+        </p:nvSpPr>
+        <p:spPr>
+          <a:xfrm>
+            <a:off x="868680" y="3922776"/>
+            <a:ext cx="5166360" cy="411480"/>
           </a:xfrm>
           <a:prstGeom prst="rect">
             <a:avLst/>
@@ -10560,26 +10601,26 @@
           <a:p>
             <a:pPr algn="l"/>
             <a:r>
-              <a:rPr sz="1200" b="0" i="0">
+              <a:rPr sz="1050" b="0">
                 <a:solidFill>
                   <a:srgbClr val="555F7A"/>
                 </a:solidFill>
               </a:rPr>
-              <a:t>Upload and browse church documents</a:t>
-            </a:r>
-          </a:p>
-        </p:txBody>
-      </p:sp>
-      <p:sp>
-        <p:nvSpPr>
-          <p:cNvPr id="34" name="Rectangle 33"/>
+              <a:t>Browse, order, EFT + POP, admin review, catalog mgmt</a:t>
+            </a:r>
+          </a:p>
+        </p:txBody>
+      </p:sp>
+      <p:sp>
+        <p:nvSpPr>
+          <p:cNvPr id="75" name="Rectangle 74"/>
           <p:cNvSpPr/>
           <p:nvPr/>
         </p:nvSpPr>
         <p:spPr>
           <a:xfrm>
-            <a:off x="365760" y="4928616"/>
-            <a:ext cx="457200" cy="457200"/>
+            <a:off x="6263640" y="3611879"/>
+            <a:ext cx="384048" cy="384048"/>
           </a:xfrm>
           <a:prstGeom prst="rect">
             <a:avLst/>
@@ -10590,6 +10631,7 @@
           <a:ln>
             <a:noFill/>
           </a:ln>
+          <a:effectLst/>
         </p:spPr>
         <p:style>
           <a:lnRef idx="1">
@@ -10615,29 +10657,29 @@
       </p:sp>
       <p:sp>
         <p:nvSpPr>
-          <p:cNvPr id="35" name="TextBox 34"/>
-          <p:cNvSpPr txBox="1"/>
-          <p:nvPr/>
-        </p:nvSpPr>
-        <p:spPr>
-          <a:xfrm>
-            <a:off x="365760" y="4928616"/>
-            <a:ext cx="457200" cy="457200"/>
-          </a:xfrm>
-          <a:prstGeom prst="rect">
-            <a:avLst/>
-          </a:prstGeom>
-          <a:noFill/>
-        </p:spPr>
-        <p:txBody>
-          <a:bodyPr wrap="square">
-            <a:spAutoFit/>
-          </a:bodyPr>
-          <a:lstStyle/>
-          <a:p>
-            <a:pPr algn="ctr"/>
-            <a:r>
-              <a:rPr sz="1600" b="0" i="0">
+          <p:cNvPr id="76" name="TextBox 75"/>
+          <p:cNvSpPr txBox="1"/>
+          <p:nvPr/>
+        </p:nvSpPr>
+        <p:spPr>
+          <a:xfrm>
+            <a:off x="6263640" y="3630168"/>
+            <a:ext cx="384048" cy="384048"/>
+          </a:xfrm>
+          <a:prstGeom prst="rect">
+            <a:avLst/>
+          </a:prstGeom>
+          <a:noFill/>
+        </p:spPr>
+        <p:txBody>
+          <a:bodyPr wrap="square">
+            <a:spAutoFit/>
+          </a:bodyPr>
+          <a:lstStyle/>
+          <a:p>
+            <a:pPr algn="ctr"/>
+            <a:r>
+              <a:rPr sz="1500" b="0">
                 <a:solidFill>
                   <a:srgbClr val="FFFFFF"/>
                 </a:solidFill>
@@ -10649,14 +10691,14 @@
       </p:sp>
       <p:sp>
         <p:nvSpPr>
-          <p:cNvPr id="36" name="TextBox 35"/>
-          <p:cNvSpPr txBox="1"/>
-          <p:nvPr/>
-        </p:nvSpPr>
-        <p:spPr>
-          <a:xfrm>
-            <a:off x="960120" y="4974336"/>
-            <a:ext cx="2743200" cy="347472"/>
+          <p:cNvPr id="77" name="TextBox 76"/>
+          <p:cNvSpPr txBox="1"/>
+          <p:nvPr/>
+        </p:nvSpPr>
+        <p:spPr>
+          <a:xfrm>
+            <a:off x="6766559" y="3611879"/>
+            <a:ext cx="5166360" cy="310896"/>
           </a:xfrm>
           <a:prstGeom prst="rect">
             <a:avLst/>
@@ -10671,26 +10713,26 @@
           <a:p>
             <a:pPr algn="l"/>
             <a:r>
-              <a:rPr sz="1300" b="1" i="0">
+              <a:rPr sz="1300" b="1">
                 <a:solidFill>
                   <a:srgbClr val="1A234E"/>
                 </a:solidFill>
               </a:rPr>
-              <a:t>Push Notifications</a:t>
-            </a:r>
-          </a:p>
-        </p:txBody>
-      </p:sp>
-      <p:sp>
-        <p:nvSpPr>
-          <p:cNvPr id="37" name="TextBox 36"/>
-          <p:cNvSpPr txBox="1"/>
-          <p:nvPr/>
-        </p:nvSpPr>
-        <p:spPr>
-          <a:xfrm>
-            <a:off x="3749039" y="4974336"/>
-            <a:ext cx="7955279" cy="347472"/>
+              <a:t>Documents</a:t>
+            </a:r>
+          </a:p>
+        </p:txBody>
+      </p:sp>
+      <p:sp>
+        <p:nvSpPr>
+          <p:cNvPr id="78" name="TextBox 77"/>
+          <p:cNvSpPr txBox="1"/>
+          <p:nvPr/>
+        </p:nvSpPr>
+        <p:spPr>
+          <a:xfrm>
+            <a:off x="6766559" y="3922776"/>
+            <a:ext cx="5166360" cy="411480"/>
           </a:xfrm>
           <a:prstGeom prst="rect">
             <a:avLst/>
@@ -10705,26 +10747,26 @@
           <a:p>
             <a:pPr algn="l"/>
             <a:r>
-              <a:rPr sz="1200" b="0" i="0">
+              <a:rPr sz="1050" b="0">
                 <a:solidFill>
                   <a:srgbClr val="555F7A"/>
                 </a:solidFill>
               </a:rPr>
-              <a:t>Expo Notifications integrated</a:t>
-            </a:r>
-          </a:p>
-        </p:txBody>
-      </p:sp>
-      <p:sp>
-        <p:nvSpPr>
-          <p:cNvPr id="38" name="Rectangle 37"/>
+              <a:t>Upload and browse church documents</a:t>
+            </a:r>
+          </a:p>
+        </p:txBody>
+      </p:sp>
+      <p:sp>
+        <p:nvSpPr>
+          <p:cNvPr id="79" name="Rectangle 78"/>
           <p:cNvSpPr/>
           <p:nvPr/>
         </p:nvSpPr>
         <p:spPr>
           <a:xfrm>
-            <a:off x="365760" y="5449823"/>
-            <a:ext cx="457200" cy="457200"/>
+            <a:off x="365760" y="4389120"/>
+            <a:ext cx="384048" cy="384048"/>
           </a:xfrm>
           <a:prstGeom prst="rect">
             <a:avLst/>
@@ -10735,6 +10777,7 @@
           <a:ln>
             <a:noFill/>
           </a:ln>
+          <a:effectLst/>
         </p:spPr>
         <p:style>
           <a:lnRef idx="1">
@@ -10760,29 +10803,29 @@
       </p:sp>
       <p:sp>
         <p:nvSpPr>
-          <p:cNvPr id="39" name="TextBox 38"/>
-          <p:cNvSpPr txBox="1"/>
-          <p:nvPr/>
-        </p:nvSpPr>
-        <p:spPr>
-          <a:xfrm>
-            <a:off x="365760" y="5449823"/>
-            <a:ext cx="457200" cy="457200"/>
-          </a:xfrm>
-          <a:prstGeom prst="rect">
-            <a:avLst/>
-          </a:prstGeom>
-          <a:noFill/>
-        </p:spPr>
-        <p:txBody>
-          <a:bodyPr wrap="square">
-            <a:spAutoFit/>
-          </a:bodyPr>
-          <a:lstStyle/>
-          <a:p>
-            <a:pPr algn="ctr"/>
-            <a:r>
-              <a:rPr sz="1600" b="0" i="0">
+          <p:cNvPr id="80" name="TextBox 79"/>
+          <p:cNvSpPr txBox="1"/>
+          <p:nvPr/>
+        </p:nvSpPr>
+        <p:spPr>
+          <a:xfrm>
+            <a:off x="365760" y="4407407"/>
+            <a:ext cx="384048" cy="384048"/>
+          </a:xfrm>
+          <a:prstGeom prst="rect">
+            <a:avLst/>
+          </a:prstGeom>
+          <a:noFill/>
+        </p:spPr>
+        <p:txBody>
+          <a:bodyPr wrap="square">
+            <a:spAutoFit/>
+          </a:bodyPr>
+          <a:lstStyle/>
+          <a:p>
+            <a:pPr algn="ctr"/>
+            <a:r>
+              <a:rPr sz="1500" b="0">
                 <a:solidFill>
                   <a:srgbClr val="FFFFFF"/>
                 </a:solidFill>
@@ -10794,14 +10837,14 @@
       </p:sp>
       <p:sp>
         <p:nvSpPr>
-          <p:cNvPr id="40" name="TextBox 39"/>
-          <p:cNvSpPr txBox="1"/>
-          <p:nvPr/>
-        </p:nvSpPr>
-        <p:spPr>
-          <a:xfrm>
-            <a:off x="960120" y="5495543"/>
-            <a:ext cx="2743200" cy="347472"/>
+          <p:cNvPr id="81" name="TextBox 80"/>
+          <p:cNvSpPr txBox="1"/>
+          <p:nvPr/>
+        </p:nvSpPr>
+        <p:spPr>
+          <a:xfrm>
+            <a:off x="868680" y="4389120"/>
+            <a:ext cx="5166360" cy="310896"/>
           </a:xfrm>
           <a:prstGeom prst="rect">
             <a:avLst/>
@@ -10816,26 +10859,26 @@
           <a:p>
             <a:pPr algn="l"/>
             <a:r>
-              <a:rPr sz="1300" b="1" i="0">
+              <a:rPr sz="1300" b="1">
                 <a:solidFill>
                   <a:srgbClr val="1A234E"/>
                 </a:solidFill>
               </a:rPr>
-              <a:t>Admin Panel</a:t>
-            </a:r>
-          </a:p>
-        </p:txBody>
-      </p:sp>
-      <p:sp>
-        <p:nvSpPr>
-          <p:cNvPr id="41" name="TextBox 40"/>
-          <p:cNvSpPr txBox="1"/>
-          <p:nvPr/>
-        </p:nvSpPr>
-        <p:spPr>
-          <a:xfrm>
-            <a:off x="3749039" y="5495543"/>
-            <a:ext cx="7955279" cy="347472"/>
+              <a:t>Push Notifications</a:t>
+            </a:r>
+          </a:p>
+        </p:txBody>
+      </p:sp>
+      <p:sp>
+        <p:nvSpPr>
+          <p:cNvPr id="82" name="TextBox 81"/>
+          <p:cNvSpPr txBox="1"/>
+          <p:nvPr/>
+        </p:nvSpPr>
+        <p:spPr>
+          <a:xfrm>
+            <a:off x="868680" y="4700016"/>
+            <a:ext cx="5166360" cy="411480"/>
           </a:xfrm>
           <a:prstGeom prst="rect">
             <a:avLst/>
@@ -10850,26 +10893,26 @@
           <a:p>
             <a:pPr algn="l"/>
             <a:r>
-              <a:rPr sz="1200" b="0" i="0">
+              <a:rPr sz="1050" b="0">
                 <a:solidFill>
                   <a:srgbClr val="555F7A"/>
                 </a:solidFill>
               </a:rPr>
-              <a:t>User management, event creation</a:t>
-            </a:r>
-          </a:p>
-        </p:txBody>
-      </p:sp>
-      <p:sp>
-        <p:nvSpPr>
-          <p:cNvPr id="42" name="Rectangle 41"/>
+              <a:t>Approval, payment &amp; order status updates</a:t>
+            </a:r>
+          </a:p>
+        </p:txBody>
+      </p:sp>
+      <p:sp>
+        <p:nvSpPr>
+          <p:cNvPr id="83" name="Rectangle 82"/>
           <p:cNvSpPr/>
           <p:nvPr/>
         </p:nvSpPr>
         <p:spPr>
           <a:xfrm>
-            <a:off x="365760" y="5971031"/>
-            <a:ext cx="457200" cy="457200"/>
+            <a:off x="6263640" y="4389120"/>
+            <a:ext cx="384048" cy="384048"/>
           </a:xfrm>
           <a:prstGeom prst="rect">
             <a:avLst/>
@@ -10880,6 +10923,7 @@
           <a:ln>
             <a:noFill/>
           </a:ln>
+          <a:effectLst/>
         </p:spPr>
         <p:style>
           <a:lnRef idx="1">
@@ -10905,29 +10949,29 @@
       </p:sp>
       <p:sp>
         <p:nvSpPr>
-          <p:cNvPr id="43" name="TextBox 42"/>
-          <p:cNvSpPr txBox="1"/>
-          <p:nvPr/>
-        </p:nvSpPr>
-        <p:spPr>
-          <a:xfrm>
-            <a:off x="365760" y="5971031"/>
-            <a:ext cx="457200" cy="457200"/>
-          </a:xfrm>
-          <a:prstGeom prst="rect">
-            <a:avLst/>
-          </a:prstGeom>
-          <a:noFill/>
-        </p:spPr>
-        <p:txBody>
-          <a:bodyPr wrap="square">
-            <a:spAutoFit/>
-          </a:bodyPr>
-          <a:lstStyle/>
-          <a:p>
-            <a:pPr algn="ctr"/>
-            <a:r>
-              <a:rPr sz="1600" b="0" i="0">
+          <p:cNvPr id="84" name="TextBox 83"/>
+          <p:cNvSpPr txBox="1"/>
+          <p:nvPr/>
+        </p:nvSpPr>
+        <p:spPr>
+          <a:xfrm>
+            <a:off x="6263640" y="4407407"/>
+            <a:ext cx="384048" cy="384048"/>
+          </a:xfrm>
+          <a:prstGeom prst="rect">
+            <a:avLst/>
+          </a:prstGeom>
+          <a:noFill/>
+        </p:spPr>
+        <p:txBody>
+          <a:bodyPr wrap="square">
+            <a:spAutoFit/>
+          </a:bodyPr>
+          <a:lstStyle/>
+          <a:p>
+            <a:pPr algn="ctr"/>
+            <a:r>
+              <a:rPr sz="1500" b="0">
                 <a:solidFill>
                   <a:srgbClr val="FFFFFF"/>
                 </a:solidFill>
@@ -10939,14 +10983,14 @@
       </p:sp>
       <p:sp>
         <p:nvSpPr>
-          <p:cNvPr id="44" name="TextBox 43"/>
-          <p:cNvSpPr txBox="1"/>
-          <p:nvPr/>
-        </p:nvSpPr>
-        <p:spPr>
-          <a:xfrm>
-            <a:off x="960120" y="6016751"/>
-            <a:ext cx="2743200" cy="347472"/>
+          <p:cNvPr id="85" name="TextBox 84"/>
+          <p:cNvSpPr txBox="1"/>
+          <p:nvPr/>
+        </p:nvSpPr>
+        <p:spPr>
+          <a:xfrm>
+            <a:off x="6766559" y="4389120"/>
+            <a:ext cx="5166360" cy="310896"/>
           </a:xfrm>
           <a:prstGeom prst="rect">
             <a:avLst/>
@@ -10961,11 +11005,303 @@
           <a:p>
             <a:pPr algn="l"/>
             <a:r>
-              <a:rPr sz="1300" b="1" i="0">
+              <a:rPr sz="1300" b="1">
                 <a:solidFill>
                   <a:srgbClr val="1A234E"/>
                 </a:solidFill>
               </a:rPr>
+              <a:t>Admin Panel</a:t>
+            </a:r>
+          </a:p>
+        </p:txBody>
+      </p:sp>
+      <p:sp>
+        <p:nvSpPr>
+          <p:cNvPr id="86" name="TextBox 85"/>
+          <p:cNvSpPr txBox="1"/>
+          <p:nvPr/>
+        </p:nvSpPr>
+        <p:spPr>
+          <a:xfrm>
+            <a:off x="6766559" y="4700016"/>
+            <a:ext cx="5166360" cy="411480"/>
+          </a:xfrm>
+          <a:prstGeom prst="rect">
+            <a:avLst/>
+          </a:prstGeom>
+          <a:noFill/>
+        </p:spPr>
+        <p:txBody>
+          <a:bodyPr wrap="square">
+            <a:spAutoFit/>
+          </a:bodyPr>
+          <a:lstStyle/>
+          <a:p>
+            <a:pPr algn="l"/>
+            <a:r>
+              <a:rPr sz="1050" b="0">
+                <a:solidFill>
+                  <a:srgbClr val="555F7A"/>
+                </a:solidFill>
+              </a:rPr>
+              <a:t>User, payment, order &amp; merchandise management</a:t>
+            </a:r>
+          </a:p>
+        </p:txBody>
+      </p:sp>
+      <p:sp>
+        <p:nvSpPr>
+          <p:cNvPr id="87" name="Rectangle 86"/>
+          <p:cNvSpPr/>
+          <p:nvPr/>
+        </p:nvSpPr>
+        <p:spPr>
+          <a:xfrm>
+            <a:off x="365760" y="5166360"/>
+            <a:ext cx="384048" cy="384048"/>
+          </a:xfrm>
+          <a:prstGeom prst="rect">
+            <a:avLst/>
+          </a:prstGeom>
+          <a:solidFill>
+            <a:srgbClr val="27AE60"/>
+          </a:solidFill>
+          <a:ln>
+            <a:noFill/>
+          </a:ln>
+          <a:effectLst/>
+        </p:spPr>
+        <p:style>
+          <a:lnRef idx="1">
+            <a:schemeClr val="accent1"/>
+          </a:lnRef>
+          <a:fillRef idx="3">
+            <a:schemeClr val="accent1"/>
+          </a:fillRef>
+          <a:effectRef idx="2">
+            <a:schemeClr val="accent1"/>
+          </a:effectRef>
+          <a:fontRef idx="minor">
+            <a:schemeClr val="lt1"/>
+          </a:fontRef>
+        </p:style>
+        <p:txBody>
+          <a:bodyPr rtlCol="0" anchor="ctr"/>
+          <a:lstStyle/>
+          <a:p>
+            <a:pPr algn="ctr"/>
+          </a:p>
+        </p:txBody>
+      </p:sp>
+      <p:sp>
+        <p:nvSpPr>
+          <p:cNvPr id="88" name="TextBox 87"/>
+          <p:cNvSpPr txBox="1"/>
+          <p:nvPr/>
+        </p:nvSpPr>
+        <p:spPr>
+          <a:xfrm>
+            <a:off x="365760" y="5184648"/>
+            <a:ext cx="384048" cy="384048"/>
+          </a:xfrm>
+          <a:prstGeom prst="rect">
+            <a:avLst/>
+          </a:prstGeom>
+          <a:noFill/>
+        </p:spPr>
+        <p:txBody>
+          <a:bodyPr wrap="square">
+            <a:spAutoFit/>
+          </a:bodyPr>
+          <a:lstStyle/>
+          <a:p>
+            <a:pPr algn="ctr"/>
+            <a:r>
+              <a:rPr sz="1500" b="0">
+                <a:solidFill>
+                  <a:srgbClr val="FFFFFF"/>
+                </a:solidFill>
+              </a:rPr>
+              <a:t>✓</a:t>
+            </a:r>
+          </a:p>
+        </p:txBody>
+      </p:sp>
+      <p:sp>
+        <p:nvSpPr>
+          <p:cNvPr id="89" name="TextBox 88"/>
+          <p:cNvSpPr txBox="1"/>
+          <p:nvPr/>
+        </p:nvSpPr>
+        <p:spPr>
+          <a:xfrm>
+            <a:off x="868680" y="5166360"/>
+            <a:ext cx="5166360" cy="310896"/>
+          </a:xfrm>
+          <a:prstGeom prst="rect">
+            <a:avLst/>
+          </a:prstGeom>
+          <a:noFill/>
+        </p:spPr>
+        <p:txBody>
+          <a:bodyPr wrap="square">
+            <a:spAutoFit/>
+          </a:bodyPr>
+          <a:lstStyle/>
+          <a:p>
+            <a:pPr algn="l"/>
+            <a:r>
+              <a:rPr sz="1300" b="1">
+                <a:solidFill>
+                  <a:srgbClr val="1A234E"/>
+                </a:solidFill>
+              </a:rPr>
+              <a:t>Bottom Safe-Area Fix</a:t>
+            </a:r>
+          </a:p>
+        </p:txBody>
+      </p:sp>
+      <p:sp>
+        <p:nvSpPr>
+          <p:cNvPr id="90" name="TextBox 89"/>
+          <p:cNvSpPr txBox="1"/>
+          <p:nvPr/>
+        </p:nvSpPr>
+        <p:spPr>
+          <a:xfrm>
+            <a:off x="868680" y="5477256"/>
+            <a:ext cx="5166360" cy="411480"/>
+          </a:xfrm>
+          <a:prstGeom prst="rect">
+            <a:avLst/>
+          </a:prstGeom>
+          <a:noFill/>
+        </p:spPr>
+        <p:txBody>
+          <a:bodyPr wrap="square">
+            <a:spAutoFit/>
+          </a:bodyPr>
+          <a:lstStyle/>
+          <a:p>
+            <a:pPr algn="l"/>
+            <a:r>
+              <a:rPr sz="1050" b="0">
+                <a:solidFill>
+                  <a:srgbClr val="555F7A"/>
+                </a:solidFill>
+              </a:rPr>
+              <a:t>Content no longer overlaps device nav bar, app-wide</a:t>
+            </a:r>
+          </a:p>
+        </p:txBody>
+      </p:sp>
+      <p:sp>
+        <p:nvSpPr>
+          <p:cNvPr id="91" name="Rectangle 90"/>
+          <p:cNvSpPr/>
+          <p:nvPr/>
+        </p:nvSpPr>
+        <p:spPr>
+          <a:xfrm>
+            <a:off x="6263640" y="5166360"/>
+            <a:ext cx="384048" cy="384048"/>
+          </a:xfrm>
+          <a:prstGeom prst="rect">
+            <a:avLst/>
+          </a:prstGeom>
+          <a:solidFill>
+            <a:srgbClr val="27AE60"/>
+          </a:solidFill>
+          <a:ln>
+            <a:noFill/>
+          </a:ln>
+          <a:effectLst/>
+        </p:spPr>
+        <p:style>
+          <a:lnRef idx="1">
+            <a:schemeClr val="accent1"/>
+          </a:lnRef>
+          <a:fillRef idx="3">
+            <a:schemeClr val="accent1"/>
+          </a:fillRef>
+          <a:effectRef idx="2">
+            <a:schemeClr val="accent1"/>
+          </a:effectRef>
+          <a:fontRef idx="minor">
+            <a:schemeClr val="lt1"/>
+          </a:fontRef>
+        </p:style>
+        <p:txBody>
+          <a:bodyPr rtlCol="0" anchor="ctr"/>
+          <a:lstStyle/>
+          <a:p>
+            <a:pPr algn="ctr"/>
+          </a:p>
+        </p:txBody>
+      </p:sp>
+      <p:sp>
+        <p:nvSpPr>
+          <p:cNvPr id="92" name="TextBox 91"/>
+          <p:cNvSpPr txBox="1"/>
+          <p:nvPr/>
+        </p:nvSpPr>
+        <p:spPr>
+          <a:xfrm>
+            <a:off x="6263640" y="5184648"/>
+            <a:ext cx="384048" cy="384048"/>
+          </a:xfrm>
+          <a:prstGeom prst="rect">
+            <a:avLst/>
+          </a:prstGeom>
+          <a:noFill/>
+        </p:spPr>
+        <p:txBody>
+          <a:bodyPr wrap="square">
+            <a:spAutoFit/>
+          </a:bodyPr>
+          <a:lstStyle/>
+          <a:p>
+            <a:pPr algn="ctr"/>
+            <a:r>
+              <a:rPr sz="1500" b="0">
+                <a:solidFill>
+                  <a:srgbClr val="FFFFFF"/>
+                </a:solidFill>
+              </a:rPr>
+              <a:t>✓</a:t>
+            </a:r>
+          </a:p>
+        </p:txBody>
+      </p:sp>
+      <p:sp>
+        <p:nvSpPr>
+          <p:cNvPr id="93" name="TextBox 92"/>
+          <p:cNvSpPr txBox="1"/>
+          <p:nvPr/>
+        </p:nvSpPr>
+        <p:spPr>
+          <a:xfrm>
+            <a:off x="6766559" y="5166360"/>
+            <a:ext cx="5166360" cy="310896"/>
+          </a:xfrm>
+          <a:prstGeom prst="rect">
+            <a:avLst/>
+          </a:prstGeom>
+          <a:noFill/>
+        </p:spPr>
+        <p:txBody>
+          <a:bodyPr wrap="square">
+            <a:spAutoFit/>
+          </a:bodyPr>
+          <a:lstStyle/>
+          <a:p>
+            <a:pPr algn="l"/>
+            <a:r>
+              <a:rPr sz="1300" b="1">
+                <a:solidFill>
+                  <a:srgbClr val="1A234E"/>
+                </a:solidFill>
+              </a:rPr>
               <a:t>Automated Tests</a:t>
             </a:r>
           </a:p>
@@ -10973,14 +11309,14 @@
       </p:sp>
       <p:sp>
         <p:nvSpPr>
-          <p:cNvPr id="45" name="TextBox 44"/>
-          <p:cNvSpPr txBox="1"/>
-          <p:nvPr/>
-        </p:nvSpPr>
-        <p:spPr>
-          <a:xfrm>
-            <a:off x="3749039" y="6016751"/>
-            <a:ext cx="7955279" cy="347472"/>
+          <p:cNvPr id="94" name="TextBox 93"/>
+          <p:cNvSpPr txBox="1"/>
+          <p:nvPr/>
+        </p:nvSpPr>
+        <p:spPr>
+          <a:xfrm>
+            <a:off x="6766559" y="5477256"/>
+            <a:ext cx="5166360" cy="411480"/>
           </a:xfrm>
           <a:prstGeom prst="rect">
             <a:avLst/>
@@ -10995,46 +11331,12 @@
           <a:p>
             <a:pPr algn="l"/>
             <a:r>
-              <a:rPr sz="1200" b="0" i="0">
+              <a:rPr sz="1050" b="0">
                 <a:solidFill>
                   <a:srgbClr val="555F7A"/>
                 </a:solidFill>
               </a:rPr>
-              <a:t>Jest test suite configured and passing</a:t>
-            </a:r>
-          </a:p>
-        </p:txBody>
-      </p:sp>
-      <p:sp>
-        <p:nvSpPr>
-          <p:cNvPr id="46" name="TextBox 45"/>
-          <p:cNvSpPr txBox="1"/>
-          <p:nvPr/>
-        </p:nvSpPr>
-        <p:spPr>
-          <a:xfrm>
-            <a:off x="274320" y="6629400"/>
-            <a:ext cx="5486400" cy="201168"/>
-          </a:xfrm>
-          <a:prstGeom prst="rect">
-            <a:avLst/>
-          </a:prstGeom>
-          <a:noFill/>
-        </p:spPr>
-        <p:txBody>
-          <a:bodyPr wrap="square">
-            <a:spAutoFit/>
-          </a:bodyPr>
-          <a:lstStyle/>
-          <a:p>
-            <a:pPr algn="l"/>
-            <a:r>
-              <a:rPr sz="800" b="0" i="1">
-                <a:solidFill>
-                  <a:srgbClr val="888888"/>
-                </a:solidFill>
-              </a:rPr>
-              <a:t>Developed by Prayburn Links</a:t>
+              <a:t>155 Jest tests configured and passing</a:t>
             </a:r>
           </a:p>
         </p:txBody>
@@ -11364,6 +11666,707 @@
 </p:sld>
 </file>
 
+<file path=ppt/slides/slide18.xml><?xml version="1.0" encoding="utf-8"?>
+<p:sld xmlns:a="http://schemas.openxmlformats.org/drawingml/2006/main" xmlns:p="http://schemas.openxmlformats.org/presentationml/2006/main" xmlns:r="http://schemas.openxmlformats.org/officeDocument/2006/relationships">
+  <p:cSld>
+    <p:spTree>
+      <p:nvGrpSpPr>
+        <p:cNvPr id="1" name=""/>
+        <p:cNvGrpSpPr/>
+        <p:nvPr/>
+      </p:nvGrpSpPr>
+      <p:grpSpPr/>
+      <p:sp>
+        <p:nvSpPr>
+          <p:cNvPr id="2" name="Rectangle 1"/>
+          <p:cNvSpPr/>
+          <p:nvPr/>
+        </p:nvSpPr>
+        <p:spPr>
+          <a:xfrm>
+            <a:off x="0" y="0"/>
+            <a:ext cx="12188952" cy="6858000"/>
+          </a:xfrm>
+          <a:prstGeom prst="rect">
+            <a:avLst/>
+          </a:prstGeom>
+          <a:solidFill>
+            <a:srgbClr val="FFFFFF"/>
+          </a:solidFill>
+          <a:ln>
+            <a:noFill/>
+          </a:ln>
+          <a:effectLst/>
+        </p:spPr>
+        <p:style>
+          <a:lnRef idx="1">
+            <a:schemeClr val="accent1"/>
+          </a:lnRef>
+          <a:fillRef idx="3">
+            <a:schemeClr val="accent1"/>
+          </a:fillRef>
+          <a:effectRef idx="2">
+            <a:schemeClr val="accent1"/>
+          </a:effectRef>
+          <a:fontRef idx="minor">
+            <a:schemeClr val="lt1"/>
+          </a:fontRef>
+        </p:style>
+        <p:txBody>
+          <a:bodyPr rtlCol="0" anchor="ctr"/>
+          <a:lstStyle/>
+          <a:p>
+            <a:pPr algn="ctr"/>
+          </a:p>
+        </p:txBody>
+      </p:sp>
+      <p:sp>
+        <p:nvSpPr>
+          <p:cNvPr id="3" name="Rectangle 2"/>
+          <p:cNvSpPr/>
+          <p:nvPr/>
+        </p:nvSpPr>
+        <p:spPr>
+          <a:xfrm>
+            <a:off x="0" y="0"/>
+            <a:ext cx="12188952" cy="1005840"/>
+          </a:xfrm>
+          <a:prstGeom prst="rect">
+            <a:avLst/>
+          </a:prstGeom>
+          <a:solidFill>
+            <a:srgbClr val="1A234E"/>
+          </a:solidFill>
+          <a:ln>
+            <a:noFill/>
+          </a:ln>
+          <a:effectLst/>
+        </p:spPr>
+        <p:style>
+          <a:lnRef idx="1">
+            <a:schemeClr val="accent1"/>
+          </a:lnRef>
+          <a:fillRef idx="3">
+            <a:schemeClr val="accent1"/>
+          </a:fillRef>
+          <a:effectRef idx="2">
+            <a:schemeClr val="accent1"/>
+          </a:effectRef>
+          <a:fontRef idx="minor">
+            <a:schemeClr val="lt1"/>
+          </a:fontRef>
+        </p:style>
+        <p:txBody>
+          <a:bodyPr rtlCol="0" anchor="ctr"/>
+          <a:lstStyle/>
+          <a:p>
+            <a:pPr algn="ctr"/>
+          </a:p>
+        </p:txBody>
+      </p:sp>
+      <p:sp>
+        <p:nvSpPr>
+          <p:cNvPr id="4" name="Rectangle 3"/>
+          <p:cNvSpPr/>
+          <p:nvPr/>
+        </p:nvSpPr>
+        <p:spPr>
+          <a:xfrm>
+            <a:off x="0" y="1005840"/>
+            <a:ext cx="12188952" cy="54864"/>
+          </a:xfrm>
+          <a:prstGeom prst="rect">
+            <a:avLst/>
+          </a:prstGeom>
+          <a:solidFill>
+            <a:srgbClr val="C9A03C"/>
+          </a:solidFill>
+          <a:ln>
+            <a:noFill/>
+          </a:ln>
+          <a:effectLst/>
+        </p:spPr>
+        <p:style>
+          <a:lnRef idx="1">
+            <a:schemeClr val="accent1"/>
+          </a:lnRef>
+          <a:fillRef idx="3">
+            <a:schemeClr val="accent1"/>
+          </a:fillRef>
+          <a:effectRef idx="2">
+            <a:schemeClr val="accent1"/>
+          </a:effectRef>
+          <a:fontRef idx="minor">
+            <a:schemeClr val="lt1"/>
+          </a:fontRef>
+        </p:style>
+        <p:txBody>
+          <a:bodyPr rtlCol="0" anchor="ctr"/>
+          <a:lstStyle/>
+          <a:p>
+            <a:pPr algn="ctr"/>
+          </a:p>
+        </p:txBody>
+      </p:sp>
+      <p:sp>
+        <p:nvSpPr>
+          <p:cNvPr id="5" name="TextBox 4"/>
+          <p:cNvSpPr txBox="1"/>
+          <p:nvPr/>
+        </p:nvSpPr>
+        <p:spPr>
+          <a:xfrm>
+            <a:off x="365760" y="182880"/>
+            <a:ext cx="11430000" cy="640080"/>
+          </a:xfrm>
+          <a:prstGeom prst="rect">
+            <a:avLst/>
+          </a:prstGeom>
+          <a:noFill/>
+        </p:spPr>
+        <p:txBody>
+          <a:bodyPr wrap="square">
+            <a:spAutoFit/>
+          </a:bodyPr>
+          <a:lstStyle/>
+          <a:p>
+            <a:pPr algn="l"/>
+            <a:r>
+              <a:rPr sz="3200" b="1">
+                <a:solidFill>
+                  <a:srgbClr val="FFFFFF"/>
+                </a:solidFill>
+              </a:rPr>
+              <a:t>Church Store — New in This Release</a:t>
+            </a:r>
+          </a:p>
+        </p:txBody>
+      </p:sp>
+      <p:sp>
+        <p:nvSpPr>
+          <p:cNvPr id="6" name="TextBox 5"/>
+          <p:cNvSpPr txBox="1"/>
+          <p:nvPr/>
+        </p:nvSpPr>
+        <p:spPr>
+          <a:xfrm>
+            <a:off x="457200" y="1371600"/>
+            <a:ext cx="6858000" cy="5029200"/>
+          </a:xfrm>
+          <a:prstGeom prst="rect">
+            <a:avLst/>
+          </a:prstGeom>
+          <a:noFill/>
+        </p:spPr>
+        <p:txBody>
+          <a:bodyPr wrap="square">
+            <a:spAutoFit/>
+          </a:bodyPr>
+          <a:lstStyle/>
+          <a:p>
+            <a:pPr algn="l">
+              <a:lnSpc>
+                <a:spcPct val="115000"/>
+              </a:lnSpc>
+            </a:pPr>
+            <a:r>
+              <a:rPr sz="1400" b="0">
+                <a:solidFill>
+                  <a:srgbClr val="555F7A"/>
+                </a:solidFill>
+              </a:rPr>
+              <a:t>• Browse merchandise in a photo grid — name, price, and item photo at a glance</a:t>
+            </a:r>
+          </a:p>
+          <a:p>
+            <a:pPr algn="l">
+              <a:lnSpc>
+                <a:spcPct val="115000"/>
+              </a:lnSpc>
+            </a:pPr>
+            <a:r>
+              <a:rPr sz="1400" b="0">
+                <a:solidFill>
+                  <a:srgbClr val="555F7A"/>
+                </a:solidFill>
+              </a:rPr>
+              <a:t>• Tap an item to see the full photo, description, and available sizes</a:t>
+            </a:r>
+          </a:p>
+          <a:p>
+            <a:pPr algn="l">
+              <a:lnSpc>
+                <a:spcPct val="115000"/>
+              </a:lnSpc>
+            </a:pPr>
+            <a:r>
+              <a:rPr sz="1400" b="0">
+                <a:solidFill>
+                  <a:srgbClr val="555F7A"/>
+                </a:solidFill>
+              </a:rPr>
+              <a:t>• Pick a size and quantity — total price calculates automatically</a:t>
+            </a:r>
+          </a:p>
+          <a:p>
+            <a:pPr algn="l">
+              <a:lnSpc>
+                <a:spcPct val="115000"/>
+              </a:lnSpc>
+            </a:pPr>
+            <a:r>
+              <a:rPr sz="1400" b="0">
+                <a:solidFill>
+                  <a:srgbClr val="555F7A"/>
+                </a:solidFill>
+              </a:rPr>
+              <a:t>• Place an order, then complete EFT payment using the on-screen bank details</a:t>
+            </a:r>
+          </a:p>
+          <a:p>
+            <a:pPr algn="l">
+              <a:lnSpc>
+                <a:spcPct val="115000"/>
+              </a:lnSpc>
+            </a:pPr>
+            <a:r>
+              <a:rPr sz="1400" b="0">
+                <a:solidFill>
+                  <a:srgbClr val="555F7A"/>
+                </a:solidFill>
+              </a:rPr>
+              <a:t>• Upload Proof of Payment directly from the order screen</a:t>
+            </a:r>
+          </a:p>
+          <a:p>
+            <a:pPr algn="l">
+              <a:lnSpc>
+                <a:spcPct val="115000"/>
+              </a:lnSpc>
+            </a:pPr>
+            <a:r>
+              <a:rPr sz="1400" b="0">
+                <a:solidFill>
+                  <a:srgbClr val="555F7A"/>
+                </a:solidFill>
+              </a:rPr>
+              <a:t>• Track every order's status (awaiting payment / under review / approved) in My Orders</a:t>
+            </a:r>
+          </a:p>
+          <a:p>
+            <a:pPr algn="l">
+              <a:lnSpc>
+                <a:spcPct val="115000"/>
+              </a:lnSpc>
+            </a:pPr>
+            <a:r>
+              <a:rPr sz="1400" b="0">
+                <a:solidFill>
+                  <a:srgbClr val="555F7A"/>
+                </a:solidFill>
+              </a:rPr>
+              <a:t>• Admins review and approve/reject orders, and manage the item catalog — add, edit,</a:t>
+            </a:r>
+          </a:p>
+          <a:p>
+            <a:pPr algn="l">
+              <a:lnSpc>
+                <a:spcPct val="115000"/>
+              </a:lnSpc>
+            </a:pPr>
+            <a:r>
+              <a:rPr sz="1400" b="0">
+                <a:solidFill>
+                  <a:srgbClr val="555F7A"/>
+                </a:solidFill>
+              </a:rPr>
+              <a:t>  publish/unpublish items with photos, pricing, and sizes, all from within the app</a:t>
+            </a:r>
+          </a:p>
+        </p:txBody>
+      </p:sp>
+      <p:sp>
+        <p:nvSpPr>
+          <p:cNvPr id="7" name="Rectangle 6"/>
+          <p:cNvSpPr/>
+          <p:nvPr/>
+        </p:nvSpPr>
+        <p:spPr>
+          <a:xfrm>
+            <a:off x="7680960" y="1371600"/>
+            <a:ext cx="4114800" cy="5029200"/>
+          </a:xfrm>
+          <a:prstGeom prst="rect">
+            <a:avLst/>
+          </a:prstGeom>
+          <a:solidFill>
+            <a:srgbClr val="F0F4FF"/>
+          </a:solidFill>
+          <a:ln>
+            <a:noFill/>
+          </a:ln>
+          <a:effectLst/>
+        </p:spPr>
+        <p:style>
+          <a:lnRef idx="1">
+            <a:schemeClr val="accent1"/>
+          </a:lnRef>
+          <a:fillRef idx="3">
+            <a:schemeClr val="accent1"/>
+          </a:fillRef>
+          <a:effectRef idx="2">
+            <a:schemeClr val="accent1"/>
+          </a:effectRef>
+          <a:fontRef idx="minor">
+            <a:schemeClr val="lt1"/>
+          </a:fontRef>
+        </p:style>
+        <p:txBody>
+          <a:bodyPr rtlCol="0" anchor="ctr"/>
+          <a:lstStyle/>
+          <a:p>
+            <a:pPr algn="ctr"/>
+          </a:p>
+        </p:txBody>
+      </p:sp>
+      <p:sp>
+        <p:nvSpPr>
+          <p:cNvPr id="8" name="Rectangle 7"/>
+          <p:cNvSpPr/>
+          <p:nvPr/>
+        </p:nvSpPr>
+        <p:spPr>
+          <a:xfrm>
+            <a:off x="7680960" y="1371600"/>
+            <a:ext cx="4114800" cy="45720"/>
+          </a:xfrm>
+          <a:prstGeom prst="rect">
+            <a:avLst/>
+          </a:prstGeom>
+          <a:solidFill>
+            <a:srgbClr val="C9A03C"/>
+          </a:solidFill>
+          <a:ln>
+            <a:noFill/>
+          </a:ln>
+          <a:effectLst/>
+        </p:spPr>
+        <p:style>
+          <a:lnRef idx="1">
+            <a:schemeClr val="accent1"/>
+          </a:lnRef>
+          <a:fillRef idx="3">
+            <a:schemeClr val="accent1"/>
+          </a:fillRef>
+          <a:effectRef idx="2">
+            <a:schemeClr val="accent1"/>
+          </a:effectRef>
+          <a:fontRef idx="minor">
+            <a:schemeClr val="lt1"/>
+          </a:fontRef>
+        </p:style>
+        <p:txBody>
+          <a:bodyPr rtlCol="0" anchor="ctr"/>
+          <a:lstStyle/>
+          <a:p>
+            <a:pPr algn="ctr"/>
+          </a:p>
+        </p:txBody>
+      </p:sp>
+      <p:sp>
+        <p:nvSpPr>
+          <p:cNvPr id="9" name="TextBox 8"/>
+          <p:cNvSpPr txBox="1"/>
+          <p:nvPr/>
+        </p:nvSpPr>
+        <p:spPr>
+          <a:xfrm>
+            <a:off x="7772400" y="1463040"/>
+            <a:ext cx="3931920" cy="365760"/>
+          </a:xfrm>
+          <a:prstGeom prst="rect">
+            <a:avLst/>
+          </a:prstGeom>
+          <a:noFill/>
+        </p:spPr>
+        <p:txBody>
+          <a:bodyPr wrap="square">
+            <a:spAutoFit/>
+          </a:bodyPr>
+          <a:lstStyle/>
+          <a:p>
+            <a:pPr algn="l"/>
+            <a:r>
+              <a:rPr sz="1400" b="1">
+                <a:solidFill>
+                  <a:srgbClr val="1A234E"/>
+                </a:solidFill>
+              </a:rPr>
+              <a:t>Member Journey</a:t>
+            </a:r>
+          </a:p>
+        </p:txBody>
+      </p:sp>
+      <p:sp>
+        <p:nvSpPr>
+          <p:cNvPr id="10" name="TextBox 9"/>
+          <p:cNvSpPr txBox="1"/>
+          <p:nvPr/>
+        </p:nvSpPr>
+        <p:spPr>
+          <a:xfrm>
+            <a:off x="7818120" y="1920240"/>
+            <a:ext cx="3840480" cy="4572000"/>
+          </a:xfrm>
+          <a:prstGeom prst="rect">
+            <a:avLst/>
+          </a:prstGeom>
+          <a:noFill/>
+        </p:spPr>
+        <p:txBody>
+          <a:bodyPr wrap="square">
+            <a:spAutoFit/>
+          </a:bodyPr>
+          <a:lstStyle/>
+          <a:p>
+            <a:pPr algn="l">
+              <a:lnSpc>
+                <a:spcPct val="100000"/>
+              </a:lnSpc>
+            </a:pPr>
+            <a:r>
+              <a:rPr sz="1300" b="0">
+                <a:solidFill>
+                  <a:srgbClr val="555F7A"/>
+                </a:solidFill>
+              </a:rPr>
+              <a:t>1  Browse the Store</a:t>
+            </a:r>
+          </a:p>
+          <a:p>
+            <a:pPr algn="l">
+              <a:lnSpc>
+                <a:spcPct val="100000"/>
+              </a:lnSpc>
+            </a:pPr>
+            <a:r>
+              <a:rPr sz="1300" b="0">
+                <a:solidFill>
+                  <a:srgbClr val="555F7A"/>
+                </a:solidFill>
+              </a:rPr>
+              <a:t/>
+            </a:r>
+          </a:p>
+          <a:p>
+            <a:pPr algn="l">
+              <a:lnSpc>
+                <a:spcPct val="100000"/>
+              </a:lnSpc>
+            </a:pPr>
+            <a:r>
+              <a:rPr sz="1300" b="0">
+                <a:solidFill>
+                  <a:srgbClr val="555F7A"/>
+                </a:solidFill>
+              </a:rPr>
+              <a:t>2  Tap an item</a:t>
+            </a:r>
+          </a:p>
+          <a:p>
+            <a:pPr algn="l">
+              <a:lnSpc>
+                <a:spcPct val="100000"/>
+              </a:lnSpc>
+            </a:pPr>
+            <a:r>
+              <a:rPr sz="1300" b="0">
+                <a:solidFill>
+                  <a:srgbClr val="555F7A"/>
+                </a:solidFill>
+              </a:rPr>
+              <a:t/>
+            </a:r>
+          </a:p>
+          <a:p>
+            <a:pPr algn="l">
+              <a:lnSpc>
+                <a:spcPct val="100000"/>
+              </a:lnSpc>
+            </a:pPr>
+            <a:r>
+              <a:rPr sz="1300" b="0">
+                <a:solidFill>
+                  <a:srgbClr val="555F7A"/>
+                </a:solidFill>
+              </a:rPr>
+              <a:t>3  Choose size &amp; quantity</a:t>
+            </a:r>
+          </a:p>
+          <a:p>
+            <a:pPr algn="l">
+              <a:lnSpc>
+                <a:spcPct val="100000"/>
+              </a:lnSpc>
+            </a:pPr>
+            <a:r>
+              <a:rPr sz="1300" b="0">
+                <a:solidFill>
+                  <a:srgbClr val="555F7A"/>
+                </a:solidFill>
+              </a:rPr>
+              <a:t/>
+            </a:r>
+          </a:p>
+          <a:p>
+            <a:pPr algn="l">
+              <a:lnSpc>
+                <a:spcPct val="100000"/>
+              </a:lnSpc>
+            </a:pPr>
+            <a:r>
+              <a:rPr sz="1300" b="0">
+                <a:solidFill>
+                  <a:srgbClr val="555F7A"/>
+                </a:solidFill>
+              </a:rPr>
+              <a:t>4  Place order</a:t>
+            </a:r>
+          </a:p>
+          <a:p>
+            <a:pPr algn="l">
+              <a:lnSpc>
+                <a:spcPct val="100000"/>
+              </a:lnSpc>
+            </a:pPr>
+            <a:r>
+              <a:rPr sz="1300" b="0">
+                <a:solidFill>
+                  <a:srgbClr val="555F7A"/>
+                </a:solidFill>
+              </a:rPr>
+              <a:t/>
+            </a:r>
+          </a:p>
+          <a:p>
+            <a:pPr algn="l">
+              <a:lnSpc>
+                <a:spcPct val="100000"/>
+              </a:lnSpc>
+            </a:pPr>
+            <a:r>
+              <a:rPr sz="1300" b="0">
+                <a:solidFill>
+                  <a:srgbClr val="555F7A"/>
+                </a:solidFill>
+              </a:rPr>
+              <a:t>5  Pay via EFT</a:t>
+            </a:r>
+          </a:p>
+          <a:p>
+            <a:pPr algn="l">
+              <a:lnSpc>
+                <a:spcPct val="100000"/>
+              </a:lnSpc>
+            </a:pPr>
+            <a:r>
+              <a:rPr sz="1300" b="0">
+                <a:solidFill>
+                  <a:srgbClr val="555F7A"/>
+                </a:solidFill>
+              </a:rPr>
+              <a:t/>
+            </a:r>
+          </a:p>
+          <a:p>
+            <a:pPr algn="l">
+              <a:lnSpc>
+                <a:spcPct val="100000"/>
+              </a:lnSpc>
+            </a:pPr>
+            <a:r>
+              <a:rPr sz="1300" b="0">
+                <a:solidFill>
+                  <a:srgbClr val="555F7A"/>
+                </a:solidFill>
+              </a:rPr>
+              <a:t>6  Upload proof of payment</a:t>
+            </a:r>
+          </a:p>
+          <a:p>
+            <a:pPr algn="l">
+              <a:lnSpc>
+                <a:spcPct val="100000"/>
+              </a:lnSpc>
+            </a:pPr>
+            <a:r>
+              <a:rPr sz="1300" b="0">
+                <a:solidFill>
+                  <a:srgbClr val="555F7A"/>
+                </a:solidFill>
+              </a:rPr>
+              <a:t/>
+            </a:r>
+          </a:p>
+          <a:p>
+            <a:pPr algn="l">
+              <a:lnSpc>
+                <a:spcPct val="100000"/>
+              </a:lnSpc>
+            </a:pPr>
+            <a:r>
+              <a:rPr sz="1300" b="0">
+                <a:solidFill>
+                  <a:srgbClr val="555F7A"/>
+                </a:solidFill>
+              </a:rPr>
+              <a:t>7  Track status in My Orders</a:t>
+            </a:r>
+          </a:p>
+        </p:txBody>
+      </p:sp>
+      <p:sp>
+        <p:nvSpPr>
+          <p:cNvPr id="11" name="TextBox 10"/>
+          <p:cNvSpPr txBox="1"/>
+          <p:nvPr/>
+        </p:nvSpPr>
+        <p:spPr>
+          <a:xfrm>
+            <a:off x="274320" y="6629400"/>
+            <a:ext cx="5486400" cy="201168"/>
+          </a:xfrm>
+          <a:prstGeom prst="rect">
+            <a:avLst/>
+          </a:prstGeom>
+          <a:noFill/>
+        </p:spPr>
+        <p:txBody>
+          <a:bodyPr wrap="square">
+            <a:spAutoFit/>
+          </a:bodyPr>
+          <a:lstStyle/>
+          <a:p>
+            <a:pPr algn="l"/>
+            <a:r>
+              <a:rPr sz="800" b="0" i="1">
+                <a:solidFill>
+                  <a:srgbClr val="888888"/>
+                </a:solidFill>
+              </a:rPr>
+              <a:t>Developed by Prayburn Links</a:t>
+            </a:r>
+          </a:p>
+        </p:txBody>
+      </p:sp>
+    </p:spTree>
+  </p:cSld>
+  <p:clrMapOvr>
+    <a:masterClrMapping/>
+  </p:clrMapOvr>
+</p:sld>
+</file>
+
 <file path=ppt/slides/slide2.xml><?xml version="1.0" encoding="utf-8"?>
 <p:sld xmlns:a="http://schemas.openxmlformats.org/drawingml/2006/main" xmlns:p="http://schemas.openxmlformats.org/presentationml/2006/main" xmlns:r="http://schemas.openxmlformats.org/officeDocument/2006/relationships">
   <p:cSld>
@@ -11792,7 +12795,7 @@
                   <a:srgbClr val="1A234E"/>
                 </a:solidFill>
               </a:rPr>
-              <a:t>36+</a:t>
+              <a:t>81+</a:t>
             </a:r>
           </a:p>
         </p:txBody>
@@ -12327,14 +13330,48 @@
       </p:sp>
       <p:sp>
         <p:nvSpPr>
-          <p:cNvPr id="6" name="Rectangle 5"/>
+          <p:cNvPr id="24" name="TextBox 23"/>
+          <p:cNvSpPr txBox="1"/>
+          <p:nvPr/>
+        </p:nvSpPr>
+        <p:spPr>
+          <a:xfrm>
+            <a:off x="274320" y="6629400"/>
+            <a:ext cx="5486400" cy="201168"/>
+          </a:xfrm>
+          <a:prstGeom prst="rect">
+            <a:avLst/>
+          </a:prstGeom>
+          <a:noFill/>
+        </p:spPr>
+        <p:txBody>
+          <a:bodyPr wrap="square">
+            <a:spAutoFit/>
+          </a:bodyPr>
+          <a:lstStyle/>
+          <a:p>
+            <a:pPr algn="l"/>
+            <a:r>
+              <a:rPr sz="800" b="0" i="1">
+                <a:solidFill>
+                  <a:srgbClr val="888888"/>
+                </a:solidFill>
+              </a:rPr>
+              <a:t>Developed by Prayburn Links</a:t>
+            </a:r>
+          </a:p>
+        </p:txBody>
+      </p:sp>
+      <p:sp>
+        <p:nvSpPr>
+          <p:cNvPr id="25" name="Rectangle 24"/>
           <p:cNvSpPr/>
           <p:nvPr/>
         </p:nvSpPr>
         <p:spPr>
           <a:xfrm>
-            <a:off x="365760" y="1371600"/>
-            <a:ext cx="3749039" cy="2194560"/>
+            <a:off x="365760" y="1188720"/>
+            <a:ext cx="3749039" cy="1508760"/>
           </a:xfrm>
           <a:prstGeom prst="rect">
             <a:avLst/>
@@ -12342,11 +13379,12 @@
           <a:solidFill>
             <a:srgbClr val="F0F4FF"/>
           </a:solidFill>
-          <a:ln w="15240">
+          <a:ln w="12700">
             <a:solidFill>
               <a:srgbClr val="C9A03C"/>
             </a:solidFill>
           </a:ln>
+          <a:effectLst/>
         </p:spPr>
         <p:style>
           <a:lnRef idx="1">
@@ -12372,14 +13410,14 @@
       </p:sp>
       <p:sp>
         <p:nvSpPr>
-          <p:cNvPr id="7" name="TextBox 6"/>
-          <p:cNvSpPr txBox="1"/>
-          <p:nvPr/>
-        </p:nvSpPr>
-        <p:spPr>
-          <a:xfrm>
-            <a:off x="502920" y="1508760"/>
-            <a:ext cx="3474720" cy="457200"/>
+          <p:cNvPr id="26" name="TextBox 25"/>
+          <p:cNvSpPr txBox="1"/>
+          <p:nvPr/>
+        </p:nvSpPr>
+        <p:spPr>
+          <a:xfrm>
+            <a:off x="502920" y="1298448"/>
+            <a:ext cx="3474720" cy="365760"/>
           </a:xfrm>
           <a:prstGeom prst="rect">
             <a:avLst/>
@@ -12394,7 +13432,7 @@
           <a:p>
             <a:pPr algn="l"/>
             <a:r>
-              <a:rPr sz="1600" b="1" i="0">
+              <a:rPr sz="1500" b="1">
                 <a:solidFill>
                   <a:srgbClr val="1A234E"/>
                 </a:solidFill>
@@ -12406,29 +13444,33 @@
       </p:sp>
       <p:sp>
         <p:nvSpPr>
-          <p:cNvPr id="8" name="TextBox 7"/>
-          <p:cNvSpPr txBox="1"/>
-          <p:nvPr/>
-        </p:nvSpPr>
-        <p:spPr>
-          <a:xfrm>
-            <a:off x="502920" y="1965960"/>
-            <a:ext cx="3474720" cy="1371600"/>
-          </a:xfrm>
-          <a:prstGeom prst="rect">
-            <a:avLst/>
-          </a:prstGeom>
-          <a:noFill/>
-        </p:spPr>
-        <p:txBody>
-          <a:bodyPr wrap="square">
-            <a:spAutoFit/>
-          </a:bodyPr>
-          <a:lstStyle/>
-          <a:p>
-            <a:pPr algn="l"/>
-            <a:r>
-              <a:rPr sz="1300" b="0" i="0">
+          <p:cNvPr id="27" name="TextBox 26"/>
+          <p:cNvSpPr txBox="1"/>
+          <p:nvPr/>
+        </p:nvSpPr>
+        <p:spPr>
+          <a:xfrm>
+            <a:off x="502920" y="1691640"/>
+            <a:ext cx="3474720" cy="960120"/>
+          </a:xfrm>
+          <a:prstGeom prst="rect">
+            <a:avLst/>
+          </a:prstGeom>
+          <a:noFill/>
+        </p:spPr>
+        <p:txBody>
+          <a:bodyPr wrap="square">
+            <a:spAutoFit/>
+          </a:bodyPr>
+          <a:lstStyle/>
+          <a:p>
+            <a:pPr algn="l">
+              <a:lnSpc>
+                <a:spcPct val="105000"/>
+              </a:lnSpc>
+            </a:pPr>
+            <a:r>
+              <a:rPr sz="1150" b="0">
                 <a:solidFill>
                   <a:srgbClr val="555F7A"/>
                 </a:solidFill>
@@ -12440,14 +13482,14 @@
       </p:sp>
       <p:sp>
         <p:nvSpPr>
-          <p:cNvPr id="9" name="Rectangle 8"/>
+          <p:cNvPr id="28" name="Rectangle 27"/>
           <p:cNvSpPr/>
           <p:nvPr/>
         </p:nvSpPr>
         <p:spPr>
           <a:xfrm>
-            <a:off x="4297680" y="1371600"/>
-            <a:ext cx="3749039" cy="2194560"/>
+            <a:off x="4297680" y="1188720"/>
+            <a:ext cx="3749039" cy="1508760"/>
           </a:xfrm>
           <a:prstGeom prst="rect">
             <a:avLst/>
@@ -12455,11 +13497,12 @@
           <a:solidFill>
             <a:srgbClr val="F0F4FF"/>
           </a:solidFill>
-          <a:ln w="15240">
+          <a:ln w="12700">
             <a:solidFill>
               <a:srgbClr val="C9A03C"/>
             </a:solidFill>
           </a:ln>
+          <a:effectLst/>
         </p:spPr>
         <p:style>
           <a:lnRef idx="1">
@@ -12485,14 +13528,14 @@
       </p:sp>
       <p:sp>
         <p:nvSpPr>
-          <p:cNvPr id="10" name="TextBox 9"/>
-          <p:cNvSpPr txBox="1"/>
-          <p:nvPr/>
-        </p:nvSpPr>
-        <p:spPr>
-          <a:xfrm>
-            <a:off x="4434840" y="1508760"/>
-            <a:ext cx="3474720" cy="457200"/>
+          <p:cNvPr id="29" name="TextBox 28"/>
+          <p:cNvSpPr txBox="1"/>
+          <p:nvPr/>
+        </p:nvSpPr>
+        <p:spPr>
+          <a:xfrm>
+            <a:off x="4434840" y="1298448"/>
+            <a:ext cx="3474720" cy="365760"/>
           </a:xfrm>
           <a:prstGeom prst="rect">
             <a:avLst/>
@@ -12507,7 +13550,7 @@
           <a:p>
             <a:pPr algn="l"/>
             <a:r>
-              <a:rPr sz="1600" b="1" i="0">
+              <a:rPr sz="1500" b="1">
                 <a:solidFill>
                   <a:srgbClr val="1A234E"/>
                 </a:solidFill>
@@ -12519,29 +13562,33 @@
       </p:sp>
       <p:sp>
         <p:nvSpPr>
-          <p:cNvPr id="11" name="TextBox 10"/>
-          <p:cNvSpPr txBox="1"/>
-          <p:nvPr/>
-        </p:nvSpPr>
-        <p:spPr>
-          <a:xfrm>
-            <a:off x="4434840" y="1965960"/>
-            <a:ext cx="3474720" cy="1371600"/>
-          </a:xfrm>
-          <a:prstGeom prst="rect">
-            <a:avLst/>
-          </a:prstGeom>
-          <a:noFill/>
-        </p:spPr>
-        <p:txBody>
-          <a:bodyPr wrap="square">
-            <a:spAutoFit/>
-          </a:bodyPr>
-          <a:lstStyle/>
-          <a:p>
-            <a:pPr algn="l"/>
-            <a:r>
-              <a:rPr sz="1300" b="0" i="0">
+          <p:cNvPr id="30" name="TextBox 29"/>
+          <p:cNvSpPr txBox="1"/>
+          <p:nvPr/>
+        </p:nvSpPr>
+        <p:spPr>
+          <a:xfrm>
+            <a:off x="4434840" y="1691640"/>
+            <a:ext cx="3474720" cy="960120"/>
+          </a:xfrm>
+          <a:prstGeom prst="rect">
+            <a:avLst/>
+          </a:prstGeom>
+          <a:noFill/>
+        </p:spPr>
+        <p:txBody>
+          <a:bodyPr wrap="square">
+            <a:spAutoFit/>
+          </a:bodyPr>
+          <a:lstStyle/>
+          <a:p>
+            <a:pPr algn="l">
+              <a:lnSpc>
+                <a:spcPct val="105000"/>
+              </a:lnSpc>
+            </a:pPr>
+            <a:r>
+              <a:rPr sz="1150" b="0">
                 <a:solidFill>
                   <a:srgbClr val="555F7A"/>
                 </a:solidFill>
@@ -12553,14 +13600,14 @@
       </p:sp>
       <p:sp>
         <p:nvSpPr>
-          <p:cNvPr id="12" name="Rectangle 11"/>
+          <p:cNvPr id="31" name="Rectangle 30"/>
           <p:cNvSpPr/>
           <p:nvPr/>
         </p:nvSpPr>
         <p:spPr>
           <a:xfrm>
-            <a:off x="8229600" y="1371600"/>
-            <a:ext cx="3749039" cy="2194560"/>
+            <a:off x="8229600" y="1188720"/>
+            <a:ext cx="3749039" cy="1508760"/>
           </a:xfrm>
           <a:prstGeom prst="rect">
             <a:avLst/>
@@ -12568,11 +13615,12 @@
           <a:solidFill>
             <a:srgbClr val="F0F4FF"/>
           </a:solidFill>
-          <a:ln w="15240">
+          <a:ln w="12700">
             <a:solidFill>
               <a:srgbClr val="C9A03C"/>
             </a:solidFill>
           </a:ln>
+          <a:effectLst/>
         </p:spPr>
         <p:style>
           <a:lnRef idx="1">
@@ -12598,14 +13646,14 @@
       </p:sp>
       <p:sp>
         <p:nvSpPr>
-          <p:cNvPr id="13" name="TextBox 12"/>
-          <p:cNvSpPr txBox="1"/>
-          <p:nvPr/>
-        </p:nvSpPr>
-        <p:spPr>
-          <a:xfrm>
-            <a:off x="8366760" y="1508760"/>
-            <a:ext cx="3474720" cy="457200"/>
+          <p:cNvPr id="32" name="TextBox 31"/>
+          <p:cNvSpPr txBox="1"/>
+          <p:nvPr/>
+        </p:nvSpPr>
+        <p:spPr>
+          <a:xfrm>
+            <a:off x="8366760" y="1298448"/>
+            <a:ext cx="3474720" cy="365760"/>
           </a:xfrm>
           <a:prstGeom prst="rect">
             <a:avLst/>
@@ -12620,7 +13668,7 @@
           <a:p>
             <a:pPr algn="l"/>
             <a:r>
-              <a:rPr sz="1600" b="1" i="0">
+              <a:rPr sz="1500" b="1">
                 <a:solidFill>
                   <a:srgbClr val="1A234E"/>
                 </a:solidFill>
@@ -12632,29 +13680,33 @@
       </p:sp>
       <p:sp>
         <p:nvSpPr>
-          <p:cNvPr id="14" name="TextBox 13"/>
-          <p:cNvSpPr txBox="1"/>
-          <p:nvPr/>
-        </p:nvSpPr>
-        <p:spPr>
-          <a:xfrm>
-            <a:off x="8366760" y="1965960"/>
-            <a:ext cx="3474720" cy="1371600"/>
-          </a:xfrm>
-          <a:prstGeom prst="rect">
-            <a:avLst/>
-          </a:prstGeom>
-          <a:noFill/>
-        </p:spPr>
-        <p:txBody>
-          <a:bodyPr wrap="square">
-            <a:spAutoFit/>
-          </a:bodyPr>
-          <a:lstStyle/>
-          <a:p>
-            <a:pPr algn="l"/>
-            <a:r>
-              <a:rPr sz="1300" b="0" i="0">
+          <p:cNvPr id="33" name="TextBox 32"/>
+          <p:cNvSpPr txBox="1"/>
+          <p:nvPr/>
+        </p:nvSpPr>
+        <p:spPr>
+          <a:xfrm>
+            <a:off x="8366760" y="1691640"/>
+            <a:ext cx="3474720" cy="960120"/>
+          </a:xfrm>
+          <a:prstGeom prst="rect">
+            <a:avLst/>
+          </a:prstGeom>
+          <a:noFill/>
+        </p:spPr>
+        <p:txBody>
+          <a:bodyPr wrap="square">
+            <a:spAutoFit/>
+          </a:bodyPr>
+          <a:lstStyle/>
+          <a:p>
+            <a:pPr algn="l">
+              <a:lnSpc>
+                <a:spcPct val="105000"/>
+              </a:lnSpc>
+            </a:pPr>
+            <a:r>
+              <a:rPr sz="1150" b="0">
                 <a:solidFill>
                   <a:srgbClr val="555F7A"/>
                 </a:solidFill>
@@ -12666,14 +13718,14 @@
       </p:sp>
       <p:sp>
         <p:nvSpPr>
-          <p:cNvPr id="15" name="Rectangle 14"/>
+          <p:cNvPr id="34" name="Rectangle 33"/>
           <p:cNvSpPr/>
           <p:nvPr/>
         </p:nvSpPr>
         <p:spPr>
           <a:xfrm>
-            <a:off x="365760" y="3840480"/>
-            <a:ext cx="3749039" cy="2194560"/>
+            <a:off x="365760" y="2834640"/>
+            <a:ext cx="3749039" cy="1508760"/>
           </a:xfrm>
           <a:prstGeom prst="rect">
             <a:avLst/>
@@ -12681,11 +13733,12 @@
           <a:solidFill>
             <a:srgbClr val="F0F4FF"/>
           </a:solidFill>
-          <a:ln w="15240">
+          <a:ln w="12700">
             <a:solidFill>
               <a:srgbClr val="C9A03C"/>
             </a:solidFill>
           </a:ln>
+          <a:effectLst/>
         </p:spPr>
         <p:style>
           <a:lnRef idx="1">
@@ -12711,14 +13764,14 @@
       </p:sp>
       <p:sp>
         <p:nvSpPr>
-          <p:cNvPr id="16" name="TextBox 15"/>
-          <p:cNvSpPr txBox="1"/>
-          <p:nvPr/>
-        </p:nvSpPr>
-        <p:spPr>
-          <a:xfrm>
-            <a:off x="502920" y="3977640"/>
-            <a:ext cx="3474720" cy="457200"/>
+          <p:cNvPr id="35" name="TextBox 34"/>
+          <p:cNvSpPr txBox="1"/>
+          <p:nvPr/>
+        </p:nvSpPr>
+        <p:spPr>
+          <a:xfrm>
+            <a:off x="502920" y="2944368"/>
+            <a:ext cx="3474720" cy="365760"/>
           </a:xfrm>
           <a:prstGeom prst="rect">
             <a:avLst/>
@@ -12733,7 +13786,7 @@
           <a:p>
             <a:pPr algn="l"/>
             <a:r>
-              <a:rPr sz="1600" b="1" i="0">
+              <a:rPr sz="1500" b="1">
                 <a:solidFill>
                   <a:srgbClr val="1A234E"/>
                 </a:solidFill>
@@ -12745,29 +13798,33 @@
       </p:sp>
       <p:sp>
         <p:nvSpPr>
-          <p:cNvPr id="17" name="TextBox 16"/>
-          <p:cNvSpPr txBox="1"/>
-          <p:nvPr/>
-        </p:nvSpPr>
-        <p:spPr>
-          <a:xfrm>
-            <a:off x="502920" y="4434840"/>
-            <a:ext cx="3474720" cy="1371600"/>
-          </a:xfrm>
-          <a:prstGeom prst="rect">
-            <a:avLst/>
-          </a:prstGeom>
-          <a:noFill/>
-        </p:spPr>
-        <p:txBody>
-          <a:bodyPr wrap="square">
-            <a:spAutoFit/>
-          </a:bodyPr>
-          <a:lstStyle/>
-          <a:p>
-            <a:pPr algn="l"/>
-            <a:r>
-              <a:rPr sz="1300" b="0" i="0">
+          <p:cNvPr id="36" name="TextBox 35"/>
+          <p:cNvSpPr txBox="1"/>
+          <p:nvPr/>
+        </p:nvSpPr>
+        <p:spPr>
+          <a:xfrm>
+            <a:off x="502920" y="3337560"/>
+            <a:ext cx="3474720" cy="960120"/>
+          </a:xfrm>
+          <a:prstGeom prst="rect">
+            <a:avLst/>
+          </a:prstGeom>
+          <a:noFill/>
+        </p:spPr>
+        <p:txBody>
+          <a:bodyPr wrap="square">
+            <a:spAutoFit/>
+          </a:bodyPr>
+          <a:lstStyle/>
+          <a:p>
+            <a:pPr algn="l">
+              <a:lnSpc>
+                <a:spcPct val="105000"/>
+              </a:lnSpc>
+            </a:pPr>
+            <a:r>
+              <a:rPr sz="1150" b="0">
                 <a:solidFill>
                   <a:srgbClr val="555F7A"/>
                 </a:solidFill>
@@ -12779,14 +13836,14 @@
       </p:sp>
       <p:sp>
         <p:nvSpPr>
-          <p:cNvPr id="18" name="Rectangle 17"/>
+          <p:cNvPr id="37" name="Rectangle 36"/>
           <p:cNvSpPr/>
           <p:nvPr/>
         </p:nvSpPr>
         <p:spPr>
           <a:xfrm>
-            <a:off x="4297680" y="3840480"/>
-            <a:ext cx="3749039" cy="2194560"/>
+            <a:off x="4297680" y="2834640"/>
+            <a:ext cx="3749039" cy="1508760"/>
           </a:xfrm>
           <a:prstGeom prst="rect">
             <a:avLst/>
@@ -12794,11 +13851,12 @@
           <a:solidFill>
             <a:srgbClr val="F0F4FF"/>
           </a:solidFill>
-          <a:ln w="15240">
+          <a:ln w="12700">
             <a:solidFill>
               <a:srgbClr val="C9A03C"/>
             </a:solidFill>
           </a:ln>
+          <a:effectLst/>
         </p:spPr>
         <p:style>
           <a:lnRef idx="1">
@@ -12824,14 +13882,14 @@
       </p:sp>
       <p:sp>
         <p:nvSpPr>
-          <p:cNvPr id="19" name="TextBox 18"/>
-          <p:cNvSpPr txBox="1"/>
-          <p:nvPr/>
-        </p:nvSpPr>
-        <p:spPr>
-          <a:xfrm>
-            <a:off x="4434840" y="3977640"/>
-            <a:ext cx="3474720" cy="457200"/>
+          <p:cNvPr id="38" name="TextBox 37"/>
+          <p:cNvSpPr txBox="1"/>
+          <p:nvPr/>
+        </p:nvSpPr>
+        <p:spPr>
+          <a:xfrm>
+            <a:off x="4434840" y="2944368"/>
+            <a:ext cx="3474720" cy="365760"/>
           </a:xfrm>
           <a:prstGeom prst="rect">
             <a:avLst/>
@@ -12846,7 +13904,7 @@
           <a:p>
             <a:pPr algn="l"/>
             <a:r>
-              <a:rPr sz="1600" b="1" i="0">
+              <a:rPr sz="1500" b="1">
                 <a:solidFill>
                   <a:srgbClr val="1A234E"/>
                 </a:solidFill>
@@ -12858,29 +13916,33 @@
       </p:sp>
       <p:sp>
         <p:nvSpPr>
-          <p:cNvPr id="20" name="TextBox 19"/>
-          <p:cNvSpPr txBox="1"/>
-          <p:nvPr/>
-        </p:nvSpPr>
-        <p:spPr>
-          <a:xfrm>
-            <a:off x="4434840" y="4434840"/>
-            <a:ext cx="3474720" cy="1371600"/>
-          </a:xfrm>
-          <a:prstGeom prst="rect">
-            <a:avLst/>
-          </a:prstGeom>
-          <a:noFill/>
-        </p:spPr>
-        <p:txBody>
-          <a:bodyPr wrap="square">
-            <a:spAutoFit/>
-          </a:bodyPr>
-          <a:lstStyle/>
-          <a:p>
-            <a:pPr algn="l"/>
-            <a:r>
-              <a:rPr sz="1300" b="0" i="0">
+          <p:cNvPr id="39" name="TextBox 38"/>
+          <p:cNvSpPr txBox="1"/>
+          <p:nvPr/>
+        </p:nvSpPr>
+        <p:spPr>
+          <a:xfrm>
+            <a:off x="4434840" y="3337560"/>
+            <a:ext cx="3474720" cy="960120"/>
+          </a:xfrm>
+          <a:prstGeom prst="rect">
+            <a:avLst/>
+          </a:prstGeom>
+          <a:noFill/>
+        </p:spPr>
+        <p:txBody>
+          <a:bodyPr wrap="square">
+            <a:spAutoFit/>
+          </a:bodyPr>
+          <a:lstStyle/>
+          <a:p>
+            <a:pPr algn="l">
+              <a:lnSpc>
+                <a:spcPct val="105000"/>
+              </a:lnSpc>
+            </a:pPr>
+            <a:r>
+              <a:rPr sz="1150" b="0">
                 <a:solidFill>
                   <a:srgbClr val="555F7A"/>
                 </a:solidFill>
@@ -12892,14 +13954,14 @@
       </p:sp>
       <p:sp>
         <p:nvSpPr>
-          <p:cNvPr id="21" name="Rectangle 20"/>
+          <p:cNvPr id="40" name="Rectangle 39"/>
           <p:cNvSpPr/>
           <p:nvPr/>
         </p:nvSpPr>
         <p:spPr>
           <a:xfrm>
-            <a:off x="8229600" y="3840480"/>
-            <a:ext cx="3749039" cy="2194560"/>
+            <a:off x="8229600" y="2834640"/>
+            <a:ext cx="3749039" cy="1508760"/>
           </a:xfrm>
           <a:prstGeom prst="rect">
             <a:avLst/>
@@ -12907,11 +13969,12 @@
           <a:solidFill>
             <a:srgbClr val="F0F4FF"/>
           </a:solidFill>
-          <a:ln w="15240">
+          <a:ln w="12700">
             <a:solidFill>
               <a:srgbClr val="C9A03C"/>
             </a:solidFill>
           </a:ln>
+          <a:effectLst/>
         </p:spPr>
         <p:style>
           <a:lnRef idx="1">
@@ -12937,14 +14000,14 @@
       </p:sp>
       <p:sp>
         <p:nvSpPr>
-          <p:cNvPr id="22" name="TextBox 21"/>
-          <p:cNvSpPr txBox="1"/>
-          <p:nvPr/>
-        </p:nvSpPr>
-        <p:spPr>
-          <a:xfrm>
-            <a:off x="8366760" y="3977640"/>
-            <a:ext cx="3474720" cy="457200"/>
+          <p:cNvPr id="41" name="TextBox 40"/>
+          <p:cNvSpPr txBox="1"/>
+          <p:nvPr/>
+        </p:nvSpPr>
+        <p:spPr>
+          <a:xfrm>
+            <a:off x="8366760" y="2944368"/>
+            <a:ext cx="3474720" cy="365760"/>
           </a:xfrm>
           <a:prstGeom prst="rect">
             <a:avLst/>
@@ -12959,11 +14022,129 @@
           <a:p>
             <a:pPr algn="l"/>
             <a:r>
-              <a:rPr sz="1600" b="1" i="0">
+              <a:rPr sz="1500" b="1">
                 <a:solidFill>
                   <a:srgbClr val="1A234E"/>
                 </a:solidFill>
               </a:rPr>
+              <a:t>🛍  Church Store</a:t>
+            </a:r>
+          </a:p>
+        </p:txBody>
+      </p:sp>
+      <p:sp>
+        <p:nvSpPr>
+          <p:cNvPr id="42" name="TextBox 41"/>
+          <p:cNvSpPr txBox="1"/>
+          <p:nvPr/>
+        </p:nvSpPr>
+        <p:spPr>
+          <a:xfrm>
+            <a:off x="8366760" y="3337560"/>
+            <a:ext cx="3474720" cy="960120"/>
+          </a:xfrm>
+          <a:prstGeom prst="rect">
+            <a:avLst/>
+          </a:prstGeom>
+          <a:noFill/>
+        </p:spPr>
+        <p:txBody>
+          <a:bodyPr wrap="square">
+            <a:spAutoFit/>
+          </a:bodyPr>
+          <a:lstStyle/>
+          <a:p>
+            <a:pPr algn="l">
+              <a:lnSpc>
+                <a:spcPct val="105000"/>
+              </a:lnSpc>
+            </a:pPr>
+            <a:r>
+              <a:rPr sz="1150" b="0">
+                <a:solidFill>
+                  <a:srgbClr val="555F7A"/>
+                </a:solidFill>
+              </a:rPr>
+              <a:t>Members browse merchandise, pick a size, and order — with EFT payment and proof upload built in.</a:t>
+            </a:r>
+          </a:p>
+        </p:txBody>
+      </p:sp>
+      <p:sp>
+        <p:nvSpPr>
+          <p:cNvPr id="43" name="Rectangle 42"/>
+          <p:cNvSpPr/>
+          <p:nvPr/>
+        </p:nvSpPr>
+        <p:spPr>
+          <a:xfrm>
+            <a:off x="365760" y="4480560"/>
+            <a:ext cx="3749039" cy="1508760"/>
+          </a:xfrm>
+          <a:prstGeom prst="rect">
+            <a:avLst/>
+          </a:prstGeom>
+          <a:solidFill>
+            <a:srgbClr val="F0F4FF"/>
+          </a:solidFill>
+          <a:ln w="12700">
+            <a:solidFill>
+              <a:srgbClr val="C9A03C"/>
+            </a:solidFill>
+          </a:ln>
+          <a:effectLst/>
+        </p:spPr>
+        <p:style>
+          <a:lnRef idx="1">
+            <a:schemeClr val="accent1"/>
+          </a:lnRef>
+          <a:fillRef idx="3">
+            <a:schemeClr val="accent1"/>
+          </a:fillRef>
+          <a:effectRef idx="2">
+            <a:schemeClr val="accent1"/>
+          </a:effectRef>
+          <a:fontRef idx="minor">
+            <a:schemeClr val="lt1"/>
+          </a:fontRef>
+        </p:style>
+        <p:txBody>
+          <a:bodyPr rtlCol="0" anchor="ctr"/>
+          <a:lstStyle/>
+          <a:p>
+            <a:pPr algn="ctr"/>
+          </a:p>
+        </p:txBody>
+      </p:sp>
+      <p:sp>
+        <p:nvSpPr>
+          <p:cNvPr id="44" name="TextBox 43"/>
+          <p:cNvSpPr txBox="1"/>
+          <p:nvPr/>
+        </p:nvSpPr>
+        <p:spPr>
+          <a:xfrm>
+            <a:off x="502920" y="4590288"/>
+            <a:ext cx="3474720" cy="365760"/>
+          </a:xfrm>
+          <a:prstGeom prst="rect">
+            <a:avLst/>
+          </a:prstGeom>
+          <a:noFill/>
+        </p:spPr>
+        <p:txBody>
+          <a:bodyPr wrap="square">
+            <a:spAutoFit/>
+          </a:bodyPr>
+          <a:lstStyle/>
+          <a:p>
+            <a:pPr algn="l"/>
+            <a:r>
+              <a:rPr sz="1500" b="1">
+                <a:solidFill>
+                  <a:srgbClr val="1A234E"/>
+                </a:solidFill>
+              </a:rPr>
               <a:t>📋  Administration</a:t>
             </a:r>
           </a:p>
@@ -12971,14 +14152,98 @@
       </p:sp>
       <p:sp>
         <p:nvSpPr>
-          <p:cNvPr id="23" name="TextBox 22"/>
-          <p:cNvSpPr txBox="1"/>
-          <p:nvPr/>
-        </p:nvSpPr>
-        <p:spPr>
-          <a:xfrm>
-            <a:off x="8366760" y="4434840"/>
-            <a:ext cx="3474720" cy="1371600"/>
+          <p:cNvPr id="45" name="TextBox 44"/>
+          <p:cNvSpPr txBox="1"/>
+          <p:nvPr/>
+        </p:nvSpPr>
+        <p:spPr>
+          <a:xfrm>
+            <a:off x="502920" y="4983480"/>
+            <a:ext cx="3474720" cy="960120"/>
+          </a:xfrm>
+          <a:prstGeom prst="rect">
+            <a:avLst/>
+          </a:prstGeom>
+          <a:noFill/>
+        </p:spPr>
+        <p:txBody>
+          <a:bodyPr wrap="square">
+            <a:spAutoFit/>
+          </a:bodyPr>
+          <a:lstStyle/>
+          <a:p>
+            <a:pPr algn="l">
+              <a:lnSpc>
+                <a:spcPct val="105000"/>
+              </a:lnSpc>
+            </a:pPr>
+            <a:r>
+              <a:rPr sz="1150" b="0">
+                <a:solidFill>
+                  <a:srgbClr val="555F7A"/>
+                </a:solidFill>
+              </a:rPr>
+              <a:t>Admins manage members, approve registrations, review payments and orders, and post announcements.</a:t>
+            </a:r>
+          </a:p>
+        </p:txBody>
+      </p:sp>
+      <p:sp>
+        <p:nvSpPr>
+          <p:cNvPr id="46" name="Rectangle 45"/>
+          <p:cNvSpPr/>
+          <p:nvPr/>
+        </p:nvSpPr>
+        <p:spPr>
+          <a:xfrm>
+            <a:off x="4297680" y="4480560"/>
+            <a:ext cx="3749039" cy="1508760"/>
+          </a:xfrm>
+          <a:prstGeom prst="rect">
+            <a:avLst/>
+          </a:prstGeom>
+          <a:solidFill>
+            <a:srgbClr val="F0F4FF"/>
+          </a:solidFill>
+          <a:ln w="12700">
+            <a:solidFill>
+              <a:srgbClr val="C9A03C"/>
+            </a:solidFill>
+          </a:ln>
+          <a:effectLst/>
+        </p:spPr>
+        <p:style>
+          <a:lnRef idx="1">
+            <a:schemeClr val="accent1"/>
+          </a:lnRef>
+          <a:fillRef idx="3">
+            <a:schemeClr val="accent1"/>
+          </a:fillRef>
+          <a:effectRef idx="2">
+            <a:schemeClr val="accent1"/>
+          </a:effectRef>
+          <a:fontRef idx="minor">
+            <a:schemeClr val="lt1"/>
+          </a:fontRef>
+        </p:style>
+        <p:txBody>
+          <a:bodyPr rtlCol="0" anchor="ctr"/>
+          <a:lstStyle/>
+          <a:p>
+            <a:pPr algn="ctr"/>
+          </a:p>
+        </p:txBody>
+      </p:sp>
+      <p:sp>
+        <p:nvSpPr>
+          <p:cNvPr id="47" name="TextBox 46"/>
+          <p:cNvSpPr txBox="1"/>
+          <p:nvPr/>
+        </p:nvSpPr>
+        <p:spPr>
+          <a:xfrm>
+            <a:off x="4434840" y="4590288"/>
+            <a:ext cx="3474720" cy="365760"/>
           </a:xfrm>
           <a:prstGeom prst="rect">
             <a:avLst/>
@@ -12993,26 +14258,110 @@
           <a:p>
             <a:pPr algn="l"/>
             <a:r>
-              <a:rPr sz="1300" b="0" i="0">
+              <a:rPr sz="1500" b="1">
+                <a:solidFill>
+                  <a:srgbClr val="1A234E"/>
+                </a:solidFill>
+              </a:rPr>
+              <a:t>👥  Leadership Boards</a:t>
+            </a:r>
+          </a:p>
+        </p:txBody>
+      </p:sp>
+      <p:sp>
+        <p:nvSpPr>
+          <p:cNvPr id="48" name="TextBox 47"/>
+          <p:cNvSpPr txBox="1"/>
+          <p:nvPr/>
+        </p:nvSpPr>
+        <p:spPr>
+          <a:xfrm>
+            <a:off x="4434840" y="4983480"/>
+            <a:ext cx="3474720" cy="960120"/>
+          </a:xfrm>
+          <a:prstGeom prst="rect">
+            <a:avLst/>
+          </a:prstGeom>
+          <a:noFill/>
+        </p:spPr>
+        <p:txBody>
+          <a:bodyPr wrap="square">
+            <a:spAutoFit/>
+          </a:bodyPr>
+          <a:lstStyle/>
+          <a:p>
+            <a:pPr algn="l">
+              <a:lnSpc>
+                <a:spcPct val="105000"/>
+              </a:lnSpc>
+            </a:pPr>
+            <a:r>
+              <a:rPr sz="1150" b="0">
                 <a:solidFill>
                   <a:srgbClr val="555F7A"/>
                 </a:solidFill>
               </a:rPr>
-              <a:t>Admins manage members, approve registrations, and post announcements.</a:t>
-            </a:r>
-          </a:p>
-        </p:txBody>
-      </p:sp>
-      <p:sp>
-        <p:nvSpPr>
-          <p:cNvPr id="24" name="TextBox 23"/>
-          <p:cNvSpPr txBox="1"/>
-          <p:nvPr/>
-        </p:nvSpPr>
-        <p:spPr>
-          <a:xfrm>
-            <a:off x="274320" y="6629400"/>
-            <a:ext cx="5486400" cy="201168"/>
+              <a:t>National Board and National Women’s Board — full leadership profiles with photos, tap to enlarge.</a:t>
+            </a:r>
+          </a:p>
+        </p:txBody>
+      </p:sp>
+      <p:sp>
+        <p:nvSpPr>
+          <p:cNvPr id="49" name="Rectangle 48"/>
+          <p:cNvSpPr/>
+          <p:nvPr/>
+        </p:nvSpPr>
+        <p:spPr>
+          <a:xfrm>
+            <a:off x="8229600" y="4480560"/>
+            <a:ext cx="3749039" cy="1508760"/>
+          </a:xfrm>
+          <a:prstGeom prst="rect">
+            <a:avLst/>
+          </a:prstGeom>
+          <a:solidFill>
+            <a:srgbClr val="F0F4FF"/>
+          </a:solidFill>
+          <a:ln w="12700">
+            <a:solidFill>
+              <a:srgbClr val="C9A03C"/>
+            </a:solidFill>
+          </a:ln>
+          <a:effectLst/>
+        </p:spPr>
+        <p:style>
+          <a:lnRef idx="1">
+            <a:schemeClr val="accent1"/>
+          </a:lnRef>
+          <a:fillRef idx="3">
+            <a:schemeClr val="accent1"/>
+          </a:fillRef>
+          <a:effectRef idx="2">
+            <a:schemeClr val="accent1"/>
+          </a:effectRef>
+          <a:fontRef idx="minor">
+            <a:schemeClr val="lt1"/>
+          </a:fontRef>
+        </p:style>
+        <p:txBody>
+          <a:bodyPr rtlCol="0" anchor="ctr"/>
+          <a:lstStyle/>
+          <a:p>
+            <a:pPr algn="ctr"/>
+          </a:p>
+        </p:txBody>
+      </p:sp>
+      <p:sp>
+        <p:nvSpPr>
+          <p:cNvPr id="50" name="TextBox 49"/>
+          <p:cNvSpPr txBox="1"/>
+          <p:nvPr/>
+        </p:nvSpPr>
+        <p:spPr>
+          <a:xfrm>
+            <a:off x="8366760" y="4590288"/>
+            <a:ext cx="3474720" cy="365760"/>
           </a:xfrm>
           <a:prstGeom prst="rect">
             <a:avLst/>
@@ -13027,12 +14376,50 @@
           <a:p>
             <a:pPr algn="l"/>
             <a:r>
-              <a:rPr sz="800" b="0" i="1">
-                <a:solidFill>
-                  <a:srgbClr val="888888"/>
-                </a:solidFill>
-              </a:rPr>
-              <a:t>Developed by Prayburn Links</a:t>
+              <a:rPr sz="1500" b="1">
+                <a:solidFill>
+                  <a:srgbClr val="1A234E"/>
+                </a:solidFill>
+              </a:rPr>
+              <a:t>🔔  Personal Dashboard</a:t>
+            </a:r>
+          </a:p>
+        </p:txBody>
+      </p:sp>
+      <p:sp>
+        <p:nvSpPr>
+          <p:cNvPr id="51" name="TextBox 50"/>
+          <p:cNvSpPr txBox="1"/>
+          <p:nvPr/>
+        </p:nvSpPr>
+        <p:spPr>
+          <a:xfrm>
+            <a:off x="8366760" y="4983480"/>
+            <a:ext cx="3474720" cy="960120"/>
+          </a:xfrm>
+          <a:prstGeom prst="rect">
+            <a:avLst/>
+          </a:prstGeom>
+          <a:noFill/>
+        </p:spPr>
+        <p:txBody>
+          <a:bodyPr wrap="square">
+            <a:spAutoFit/>
+          </a:bodyPr>
+          <a:lstStyle/>
+          <a:p>
+            <a:pPr algn="l">
+              <a:lnSpc>
+                <a:spcPct val="105000"/>
+              </a:lnSpc>
+            </a:pPr>
+            <a:r>
+              <a:rPr sz="1150" b="0">
+                <a:solidFill>
+                  <a:srgbClr val="555F7A"/>
+                </a:solidFill>
+              </a:rPr>
+              <a:t>My Events, My Orders, Giving History and Notifications — every member tracks their own activity.</a:t>
             </a:r>
           </a:p>
         </p:txBody>
@@ -13170,7 +14557,7 @@
                   <a:srgbClr val="FFFFFF"/>
                 </a:solidFill>
               </a:rPr>
-              <a:t>Feature Overview — All 13 Screens</a:t>
+              <a:t>Feature Overview — All 19 Screens</a:t>
             </a:r>
           </a:p>
         </p:txBody>
@@ -13220,7 +14607,41 @@
       </p:sp>
       <p:sp>
         <p:nvSpPr>
-          <p:cNvPr id="6" name="Rectangle 5"/>
+          <p:cNvPr id="39" name="TextBox 38"/>
+          <p:cNvSpPr txBox="1"/>
+          <p:nvPr/>
+        </p:nvSpPr>
+        <p:spPr>
+          <a:xfrm>
+            <a:off x="274320" y="6629400"/>
+            <a:ext cx="5486400" cy="201168"/>
+          </a:xfrm>
+          <a:prstGeom prst="rect">
+            <a:avLst/>
+          </a:prstGeom>
+          <a:noFill/>
+        </p:spPr>
+        <p:txBody>
+          <a:bodyPr wrap="square">
+            <a:spAutoFit/>
+          </a:bodyPr>
+          <a:lstStyle/>
+          <a:p>
+            <a:pPr algn="l"/>
+            <a:r>
+              <a:rPr sz="800" b="0" i="1">
+                <a:solidFill>
+                  <a:srgbClr val="666688"/>
+                </a:solidFill>
+              </a:rPr>
+              <a:t>Developed by Prayburn Links</a:t>
+            </a:r>
+          </a:p>
+        </p:txBody>
+      </p:sp>
+      <p:sp>
+        <p:nvSpPr>
+          <p:cNvPr id="40" name="Rectangle 39"/>
           <p:cNvSpPr/>
           <p:nvPr/>
         </p:nvSpPr>
@@ -13238,6 +14659,7 @@
           <a:ln>
             <a:noFill/>
           </a:ln>
+          <a:effectLst/>
         </p:spPr>
         <p:style>
           <a:lnRef idx="1">
@@ -13263,7 +14685,7 @@
       </p:sp>
       <p:sp>
         <p:nvSpPr>
-          <p:cNvPr id="7" name="TextBox 6"/>
+          <p:cNvPr id="41" name="TextBox 40"/>
           <p:cNvSpPr txBox="1"/>
           <p:nvPr/>
         </p:nvSpPr>
@@ -13285,7 +14707,7 @@
           <a:p>
             <a:pPr algn="l"/>
             <a:r>
-              <a:rPr sz="1200" b="1" i="0">
+              <a:rPr sz="1200" b="1">
                 <a:solidFill>
                   <a:srgbClr val="C9A03C"/>
                 </a:solidFill>
@@ -13297,7 +14719,7 @@
       </p:sp>
       <p:sp>
         <p:nvSpPr>
-          <p:cNvPr id="8" name="TextBox 7"/>
+          <p:cNvPr id="42" name="TextBox 41"/>
           <p:cNvSpPr txBox="1"/>
           <p:nvPr/>
         </p:nvSpPr>
@@ -13319,7 +14741,7 @@
           <a:p>
             <a:pPr algn="l"/>
             <a:r>
-              <a:rPr sz="1100" b="0" i="0">
+              <a:rPr sz="1050" b="0">
                 <a:solidFill>
                   <a:srgbClr val="CCD6FF"/>
                 </a:solidFill>
@@ -13331,7 +14753,7 @@
       </p:sp>
       <p:sp>
         <p:nvSpPr>
-          <p:cNvPr id="9" name="Rectangle 8"/>
+          <p:cNvPr id="43" name="Rectangle 42"/>
           <p:cNvSpPr/>
           <p:nvPr/>
         </p:nvSpPr>
@@ -13349,6 +14771,7 @@
           <a:ln>
             <a:noFill/>
           </a:ln>
+          <a:effectLst/>
         </p:spPr>
         <p:style>
           <a:lnRef idx="1">
@@ -13374,7 +14797,7 @@
       </p:sp>
       <p:sp>
         <p:nvSpPr>
-          <p:cNvPr id="10" name="TextBox 9"/>
+          <p:cNvPr id="44" name="TextBox 43"/>
           <p:cNvSpPr txBox="1"/>
           <p:nvPr/>
         </p:nvSpPr>
@@ -13396,7 +14819,7 @@
           <a:p>
             <a:pPr algn="l"/>
             <a:r>
-              <a:rPr sz="1200" b="1" i="0">
+              <a:rPr sz="1200" b="1">
                 <a:solidFill>
                   <a:srgbClr val="C9A03C"/>
                 </a:solidFill>
@@ -13408,7 +14831,7 @@
       </p:sp>
       <p:sp>
         <p:nvSpPr>
-          <p:cNvPr id="11" name="TextBox 10"/>
+          <p:cNvPr id="45" name="TextBox 44"/>
           <p:cNvSpPr txBox="1"/>
           <p:nvPr/>
         </p:nvSpPr>
@@ -13430,7 +14853,7 @@
           <a:p>
             <a:pPr algn="l"/>
             <a:r>
-              <a:rPr sz="1100" b="0" i="0">
+              <a:rPr sz="1050" b="0">
                 <a:solidFill>
                   <a:srgbClr val="CCD6FF"/>
                 </a:solidFill>
@@ -13442,7 +14865,7 @@
       </p:sp>
       <p:sp>
         <p:nvSpPr>
-          <p:cNvPr id="12" name="Rectangle 11"/>
+          <p:cNvPr id="46" name="Rectangle 45"/>
           <p:cNvSpPr/>
           <p:nvPr/>
         </p:nvSpPr>
@@ -13460,6 +14883,7 @@
           <a:ln>
             <a:noFill/>
           </a:ln>
+          <a:effectLst/>
         </p:spPr>
         <p:style>
           <a:lnRef idx="1">
@@ -13485,7 +14909,7 @@
       </p:sp>
       <p:sp>
         <p:nvSpPr>
-          <p:cNvPr id="13" name="TextBox 12"/>
+          <p:cNvPr id="47" name="TextBox 46"/>
           <p:cNvSpPr txBox="1"/>
           <p:nvPr/>
         </p:nvSpPr>
@@ -13507,19 +14931,19 @@
           <a:p>
             <a:pPr algn="l"/>
             <a:r>
-              <a:rPr sz="1200" b="1" i="0">
+              <a:rPr sz="1200" b="1">
                 <a:solidFill>
                   <a:srgbClr val="C9A03C"/>
                 </a:solidFill>
               </a:rPr>
-              <a:t>🎟 Events</a:t>
-            </a:r>
-          </a:p>
-        </p:txBody>
-      </p:sp>
-      <p:sp>
-        <p:nvSpPr>
-          <p:cNvPr id="14" name="TextBox 13"/>
+              <a:t>🎟 Events + My Events</a:t>
+            </a:r>
+          </a:p>
+        </p:txBody>
+      </p:sp>
+      <p:sp>
+        <p:nvSpPr>
+          <p:cNvPr id="48" name="TextBox 47"/>
           <p:cNvSpPr txBox="1"/>
           <p:nvPr/>
         </p:nvSpPr>
@@ -13541,19 +14965,19 @@
           <a:p>
             <a:pPr algn="l"/>
             <a:r>
-              <a:rPr sz="1100" b="0" i="0">
+              <a:rPr sz="1050" b="0">
                 <a:solidFill>
                   <a:srgbClr val="CCD6FF"/>
                 </a:solidFill>
               </a:rPr>
-              <a:t>Browse all events by category; one-tap registration + POP upload</a:t>
-            </a:r>
-          </a:p>
-        </p:txBody>
-      </p:sp>
-      <p:sp>
-        <p:nvSpPr>
-          <p:cNvPr id="15" name="Rectangle 14"/>
+              <a:t>Browse by category; one-tap registration + POP upload; personal history</a:t>
+            </a:r>
+          </a:p>
+        </p:txBody>
+      </p:sp>
+      <p:sp>
+        <p:nvSpPr>
+          <p:cNvPr id="49" name="Rectangle 48"/>
           <p:cNvSpPr/>
           <p:nvPr/>
         </p:nvSpPr>
@@ -13571,6 +14995,7 @@
           <a:ln>
             <a:noFill/>
           </a:ln>
+          <a:effectLst/>
         </p:spPr>
         <p:style>
           <a:lnRef idx="1">
@@ -13596,7 +15021,7 @@
       </p:sp>
       <p:sp>
         <p:nvSpPr>
-          <p:cNvPr id="16" name="TextBox 15"/>
+          <p:cNvPr id="50" name="TextBox 49"/>
           <p:cNvSpPr txBox="1"/>
           <p:nvPr/>
         </p:nvSpPr>
@@ -13618,19 +15043,19 @@
           <a:p>
             <a:pPr algn="l"/>
             <a:r>
-              <a:rPr sz="1200" b="1" i="0">
+              <a:rPr sz="1200" b="1">
                 <a:solidFill>
                   <a:srgbClr val="C9A03C"/>
                 </a:solidFill>
               </a:rPr>
-              <a:t>💛 Giving</a:t>
-            </a:r>
-          </a:p>
-        </p:txBody>
-      </p:sp>
-      <p:sp>
-        <p:nvSpPr>
-          <p:cNvPr id="17" name="TextBox 16"/>
+              <a:t>💛 Giving + History</a:t>
+            </a:r>
+          </a:p>
+        </p:txBody>
+      </p:sp>
+      <p:sp>
+        <p:nvSpPr>
+          <p:cNvPr id="51" name="TextBox 50"/>
           <p:cNvSpPr txBox="1"/>
           <p:nvPr/>
         </p:nvSpPr>
@@ -13652,19 +15077,19 @@
           <a:p>
             <a:pPr algn="l"/>
             <a:r>
-              <a:rPr sz="1100" b="0" i="0">
+              <a:rPr sz="1050" b="0">
                 <a:solidFill>
                   <a:srgbClr val="CCD6FF"/>
                 </a:solidFill>
               </a:rPr>
-              <a:t>6 fund types; preset amounts; EFT bank details with reference</a:t>
-            </a:r>
-          </a:p>
-        </p:txBody>
-      </p:sp>
-      <p:sp>
-        <p:nvSpPr>
-          <p:cNvPr id="18" name="Rectangle 17"/>
+              <a:t>6 fund types; preset amounts; EFT bank details; personal giving history</a:t>
+            </a:r>
+          </a:p>
+        </p:txBody>
+      </p:sp>
+      <p:sp>
+        <p:nvSpPr>
+          <p:cNvPr id="52" name="Rectangle 51"/>
           <p:cNvSpPr/>
           <p:nvPr/>
         </p:nvSpPr>
@@ -13682,6 +15107,7 @@
           <a:ln>
             <a:noFill/>
           </a:ln>
+          <a:effectLst/>
         </p:spPr>
         <p:style>
           <a:lnRef idx="1">
@@ -13707,7 +15133,7 @@
       </p:sp>
       <p:sp>
         <p:nvSpPr>
-          <p:cNvPr id="19" name="TextBox 18"/>
+          <p:cNvPr id="53" name="TextBox 52"/>
           <p:cNvSpPr txBox="1"/>
           <p:nvPr/>
         </p:nvSpPr>
@@ -13729,19 +15155,19 @@
           <a:p>
             <a:pPr algn="l"/>
             <a:r>
-              <a:rPr sz="1200" b="1" i="0">
+              <a:rPr sz="1200" b="1">
                 <a:solidFill>
                   <a:srgbClr val="C9A03C"/>
                 </a:solidFill>
               </a:rPr>
-              <a:t>🙏 Prayer Wall</a:t>
-            </a:r>
-          </a:p>
-        </p:txBody>
-      </p:sp>
-      <p:sp>
-        <p:nvSpPr>
-          <p:cNvPr id="20" name="TextBox 19"/>
+              <a:t>🙏 Prayer Wall + Mine</a:t>
+            </a:r>
+          </a:p>
+        </p:txBody>
+      </p:sp>
+      <p:sp>
+        <p:nvSpPr>
+          <p:cNvPr id="54" name="TextBox 53"/>
           <p:cNvSpPr txBox="1"/>
           <p:nvPr/>
         </p:nvSpPr>
@@ -13763,19 +15189,19 @@
           <a:p>
             <a:pPr algn="l"/>
             <a:r>
-              <a:rPr sz="1100" b="0" i="0">
+              <a:rPr sz="1050" b="0">
                 <a:solidFill>
                   <a:srgbClr val="CCD6FF"/>
                 </a:solidFill>
               </a:rPr>
-              <a:t>National &amp; district prayer requests; pray counter; submit your own</a:t>
-            </a:r>
-          </a:p>
-        </p:txBody>
-      </p:sp>
-      <p:sp>
-        <p:nvSpPr>
-          <p:cNvPr id="21" name="Rectangle 20"/>
+              <a:t>National &amp; district requests; pray counter; personal request history</a:t>
+            </a:r>
+          </a:p>
+        </p:txBody>
+      </p:sp>
+      <p:sp>
+        <p:nvSpPr>
+          <p:cNvPr id="55" name="Rectangle 54"/>
           <p:cNvSpPr/>
           <p:nvPr/>
         </p:nvSpPr>
@@ -13793,6 +15219,7 @@
           <a:ln>
             <a:noFill/>
           </a:ln>
+          <a:effectLst/>
         </p:spPr>
         <p:style>
           <a:lnRef idx="1">
@@ -13818,7 +15245,7 @@
       </p:sp>
       <p:sp>
         <p:nvSpPr>
-          <p:cNvPr id="22" name="TextBox 21"/>
+          <p:cNvPr id="56" name="TextBox 55"/>
           <p:cNvSpPr txBox="1"/>
           <p:nvPr/>
         </p:nvSpPr>
@@ -13840,7 +15267,7 @@
           <a:p>
             <a:pPr algn="l"/>
             <a:r>
-              <a:rPr sz="1200" b="1" i="0">
+              <a:rPr sz="1200" b="1">
                 <a:solidFill>
                   <a:srgbClr val="C9A03C"/>
                 </a:solidFill>
@@ -13852,7 +15279,7 @@
       </p:sp>
       <p:sp>
         <p:nvSpPr>
-          <p:cNvPr id="23" name="TextBox 22"/>
+          <p:cNvPr id="57" name="TextBox 56"/>
           <p:cNvSpPr txBox="1"/>
           <p:nvPr/>
         </p:nvSpPr>
@@ -13874,7 +15301,7 @@
           <a:p>
             <a:pPr algn="l"/>
             <a:r>
-              <a:rPr sz="1100" b="0" i="0">
+              <a:rPr sz="1050" b="0">
                 <a:solidFill>
                   <a:srgbClr val="CCD6FF"/>
                 </a:solidFill>
@@ -13886,7 +15313,7 @@
       </p:sp>
       <p:sp>
         <p:nvSpPr>
-          <p:cNvPr id="24" name="Rectangle 23"/>
+          <p:cNvPr id="58" name="Rectangle 57"/>
           <p:cNvSpPr/>
           <p:nvPr/>
         </p:nvSpPr>
@@ -13904,6 +15331,7 @@
           <a:ln>
             <a:noFill/>
           </a:ln>
+          <a:effectLst/>
         </p:spPr>
         <p:style>
           <a:lnRef idx="1">
@@ -13929,7 +15357,7 @@
       </p:sp>
       <p:sp>
         <p:nvSpPr>
-          <p:cNvPr id="25" name="TextBox 24"/>
+          <p:cNvPr id="59" name="TextBox 58"/>
           <p:cNvSpPr txBox="1"/>
           <p:nvPr/>
         </p:nvSpPr>
@@ -13951,7 +15379,7 @@
           <a:p>
             <a:pPr algn="l"/>
             <a:r>
-              <a:rPr sz="1200" b="1" i="0">
+              <a:rPr sz="1200" b="1">
                 <a:solidFill>
                   <a:srgbClr val="C9A03C"/>
                 </a:solidFill>
@@ -13963,7 +15391,7 @@
       </p:sp>
       <p:sp>
         <p:nvSpPr>
-          <p:cNvPr id="26" name="TextBox 25"/>
+          <p:cNvPr id="60" name="TextBox 59"/>
           <p:cNvSpPr txBox="1"/>
           <p:nvPr/>
         </p:nvSpPr>
@@ -13985,19 +15413,19 @@
           <a:p>
             <a:pPr algn="l"/>
             <a:r>
-              <a:rPr sz="1100" b="0" i="0">
+              <a:rPr sz="1050" b="0">
                 <a:solidFill>
                   <a:srgbClr val="CCD6FF"/>
                 </a:solidFill>
               </a:rPr>
-              <a:t>All 9 districts, congregation count, and district board details</a:t>
-            </a:r>
-          </a:p>
-        </p:txBody>
-      </p:sp>
-      <p:sp>
-        <p:nvSpPr>
-          <p:cNvPr id="27" name="Rectangle 26"/>
+              <a:t>All 9 districts, congregation counts, and district board details</a:t>
+            </a:r>
+          </a:p>
+        </p:txBody>
+      </p:sp>
+      <p:sp>
+        <p:nvSpPr>
+          <p:cNvPr id="61" name="Rectangle 60"/>
           <p:cNvSpPr/>
           <p:nvPr/>
         </p:nvSpPr>
@@ -14015,6 +15443,7 @@
           <a:ln>
             <a:noFill/>
           </a:ln>
+          <a:effectLst/>
         </p:spPr>
         <p:style>
           <a:lnRef idx="1">
@@ -14040,7 +15469,7 @@
       </p:sp>
       <p:sp>
         <p:nvSpPr>
-          <p:cNvPr id="28" name="TextBox 27"/>
+          <p:cNvPr id="62" name="TextBox 61"/>
           <p:cNvSpPr txBox="1"/>
           <p:nvPr/>
         </p:nvSpPr>
@@ -14062,19 +15491,19 @@
           <a:p>
             <a:pPr algn="l"/>
             <a:r>
-              <a:rPr sz="1200" b="1" i="0">
+              <a:rPr sz="1200" b="1">
                 <a:solidFill>
                   <a:srgbClr val="C9A03C"/>
                 </a:solidFill>
               </a:rPr>
-              <a:t>📋 National Board</a:t>
-            </a:r>
-          </a:p>
-        </p:txBody>
-      </p:sp>
-      <p:sp>
-        <p:nvSpPr>
-          <p:cNvPr id="29" name="TextBox 28"/>
+              <a:t>📋 National &amp; Women’s Board</a:t>
+            </a:r>
+          </a:p>
+        </p:txBody>
+      </p:sp>
+      <p:sp>
+        <p:nvSpPr>
+          <p:cNvPr id="63" name="TextBox 62"/>
           <p:cNvSpPr txBox="1"/>
           <p:nvPr/>
         </p:nvSpPr>
@@ -14096,19 +15525,19 @@
           <a:p>
             <a:pPr algn="l"/>
             <a:r>
-              <a:rPr sz="1100" b="0" i="0">
+              <a:rPr sz="1050" b="0">
                 <a:solidFill>
                   <a:srgbClr val="CCD6FF"/>
                 </a:solidFill>
               </a:rPr>
-              <a:t>Leadership profiles with photos, titles, and contact info</a:t>
-            </a:r>
-          </a:p>
-        </p:txBody>
-      </p:sp>
-      <p:sp>
-        <p:nvSpPr>
-          <p:cNvPr id="30" name="Rectangle 29"/>
+              <a:t>Leadership profiles with photos; tap to enlarge; separate men’s &amp; women’s boards</a:t>
+            </a:r>
+          </a:p>
+        </p:txBody>
+      </p:sp>
+      <p:sp>
+        <p:nvSpPr>
+          <p:cNvPr id="64" name="Rectangle 63"/>
           <p:cNvSpPr/>
           <p:nvPr/>
         </p:nvSpPr>
@@ -14126,6 +15555,7 @@
           <a:ln>
             <a:noFill/>
           </a:ln>
+          <a:effectLst/>
         </p:spPr>
         <p:style>
           <a:lnRef idx="1">
@@ -14151,13 +15581,13 @@
       </p:sp>
       <p:sp>
         <p:nvSpPr>
-          <p:cNvPr id="31" name="TextBox 30"/>
-          <p:cNvSpPr txBox="1"/>
-          <p:nvPr/>
-        </p:nvSpPr>
-        <p:spPr>
-          <a:xfrm>
-            <a:off x="411480" y="3136392"/>
+          <p:cNvPr id="65" name="TextBox 64"/>
+          <p:cNvSpPr txBox="1"/>
+          <p:nvPr/>
+        </p:nvSpPr>
+        <p:spPr>
+          <a:xfrm>
+            <a:off x="411480" y="3136391"/>
             <a:ext cx="2103120" cy="365760"/>
           </a:xfrm>
           <a:prstGeom prst="rect">
@@ -14173,25 +15603,25 @@
           <a:p>
             <a:pPr algn="l"/>
             <a:r>
-              <a:rPr sz="1200" b="1" i="0">
+              <a:rPr sz="1200" b="1">
                 <a:solidFill>
                   <a:srgbClr val="C9A03C"/>
                 </a:solidFill>
               </a:rPr>
-              <a:t>📂 Documents</a:t>
-            </a:r>
-          </a:p>
-        </p:txBody>
-      </p:sp>
-      <p:sp>
-        <p:nvSpPr>
-          <p:cNvPr id="32" name="TextBox 31"/>
-          <p:cNvSpPr txBox="1"/>
-          <p:nvPr/>
-        </p:nvSpPr>
-        <p:spPr>
-          <a:xfrm>
-            <a:off x="2514600" y="3136392"/>
+              <a:t>🛍 Store + My Orders</a:t>
+            </a:r>
+          </a:p>
+        </p:txBody>
+      </p:sp>
+      <p:sp>
+        <p:nvSpPr>
+          <p:cNvPr id="66" name="TextBox 65"/>
+          <p:cNvSpPr txBox="1"/>
+          <p:nvPr/>
+        </p:nvSpPr>
+        <p:spPr>
+          <a:xfrm>
+            <a:off x="2514600" y="3136391"/>
             <a:ext cx="3383280" cy="365760"/>
           </a:xfrm>
           <a:prstGeom prst="rect">
@@ -14207,19 +15637,19 @@
           <a:p>
             <a:pPr algn="l"/>
             <a:r>
-              <a:rPr sz="1100" b="0" i="0">
+              <a:rPr sz="1050" b="0">
                 <a:solidFill>
                   <a:srgbClr val="CCD6FF"/>
                 </a:solidFill>
               </a:rPr>
-              <a:t>Shared church documents: policies, forms, minutes</a:t>
-            </a:r>
-          </a:p>
-        </p:txBody>
-      </p:sp>
-      <p:sp>
-        <p:nvSpPr>
-          <p:cNvPr id="33" name="Rectangle 32"/>
+              <a:t>Browse merchandise, pick size/qty, EFT + POP, track order status</a:t>
+            </a:r>
+          </a:p>
+        </p:txBody>
+      </p:sp>
+      <p:sp>
+        <p:nvSpPr>
+          <p:cNvPr id="67" name="Rectangle 66"/>
           <p:cNvSpPr/>
           <p:nvPr/>
         </p:nvSpPr>
@@ -14237,6 +15667,7 @@
           <a:ln>
             <a:noFill/>
           </a:ln>
+          <a:effectLst/>
         </p:spPr>
         <p:style>
           <a:lnRef idx="1">
@@ -14262,13 +15693,13 @@
       </p:sp>
       <p:sp>
         <p:nvSpPr>
-          <p:cNvPr id="34" name="TextBox 33"/>
-          <p:cNvSpPr txBox="1"/>
-          <p:nvPr/>
-        </p:nvSpPr>
-        <p:spPr>
-          <a:xfrm>
-            <a:off x="6355080" y="3136392"/>
+          <p:cNvPr id="68" name="TextBox 67"/>
+          <p:cNvSpPr txBox="1"/>
+          <p:nvPr/>
+        </p:nvSpPr>
+        <p:spPr>
+          <a:xfrm>
+            <a:off x="6355080" y="3136391"/>
             <a:ext cx="2103120" cy="365760"/>
           </a:xfrm>
           <a:prstGeom prst="rect">
@@ -14284,25 +15715,25 @@
           <a:p>
             <a:pPr algn="l"/>
             <a:r>
-              <a:rPr sz="1200" b="1" i="0">
+              <a:rPr sz="1200" b="1">
                 <a:solidFill>
                   <a:srgbClr val="C9A03C"/>
                 </a:solidFill>
               </a:rPr>
-              <a:t>👤 Profile</a:t>
-            </a:r>
-          </a:p>
-        </p:txBody>
-      </p:sp>
-      <p:sp>
-        <p:nvSpPr>
-          <p:cNvPr id="35" name="TextBox 34"/>
-          <p:cNvSpPr txBox="1"/>
-          <p:nvPr/>
-        </p:nvSpPr>
-        <p:spPr>
-          <a:xfrm>
-            <a:off x="8458200" y="3136392"/>
+              <a:t>📂 Documents</a:t>
+            </a:r>
+          </a:p>
+        </p:txBody>
+      </p:sp>
+      <p:sp>
+        <p:nvSpPr>
+          <p:cNvPr id="69" name="TextBox 68"/>
+          <p:cNvSpPr txBox="1"/>
+          <p:nvPr/>
+        </p:nvSpPr>
+        <p:spPr>
+          <a:xfrm>
+            <a:off x="8458200" y="3136391"/>
             <a:ext cx="3383280" cy="365760"/>
           </a:xfrm>
           <a:prstGeom prst="rect">
@@ -14318,19 +15749,19 @@
           <a:p>
             <a:pPr algn="l"/>
             <a:r>
-              <a:rPr sz="1100" b="0" i="0">
+              <a:rPr sz="1050" b="0">
                 <a:solidFill>
                   <a:srgbClr val="CCD6FF"/>
                 </a:solidFill>
               </a:rPr>
-              <a:t>Member profile, congregation, role, and account settings</a:t>
-            </a:r>
-          </a:p>
-        </p:txBody>
-      </p:sp>
-      <p:sp>
-        <p:nvSpPr>
-          <p:cNvPr id="36" name="Rectangle 35"/>
+              <a:t>Shared church documents: policies, forms, minutes</a:t>
+            </a:r>
+          </a:p>
+        </p:txBody>
+      </p:sp>
+      <p:sp>
+        <p:nvSpPr>
+          <p:cNvPr id="70" name="Rectangle 69"/>
           <p:cNvSpPr/>
           <p:nvPr/>
         </p:nvSpPr>
@@ -14348,6 +15779,7 @@
           <a:ln>
             <a:noFill/>
           </a:ln>
+          <a:effectLst/>
         </p:spPr>
         <p:style>
           <a:lnRef idx="1">
@@ -14373,7 +15805,7 @@
       </p:sp>
       <p:sp>
         <p:nvSpPr>
-          <p:cNvPr id="37" name="TextBox 36"/>
+          <p:cNvPr id="71" name="TextBox 70"/>
           <p:cNvSpPr txBox="1"/>
           <p:nvPr/>
         </p:nvSpPr>
@@ -14395,19 +15827,19 @@
           <a:p>
             <a:pPr algn="l"/>
             <a:r>
-              <a:rPr sz="1200" b="1" i="0">
+              <a:rPr sz="1200" b="1">
                 <a:solidFill>
                   <a:srgbClr val="C9A03C"/>
                 </a:solidFill>
               </a:rPr>
-              <a:t>🛡  Admin Panel</a:t>
-            </a:r>
-          </a:p>
-        </p:txBody>
-      </p:sp>
-      <p:sp>
-        <p:nvSpPr>
-          <p:cNvPr id="38" name="TextBox 37"/>
+              <a:t>🔔 Notifications</a:t>
+            </a:r>
+          </a:p>
+        </p:txBody>
+      </p:sp>
+      <p:sp>
+        <p:nvSpPr>
+          <p:cNvPr id="72" name="TextBox 71"/>
           <p:cNvSpPr txBox="1"/>
           <p:nvPr/>
         </p:nvSpPr>
@@ -14429,26 +15861,70 @@
           <a:p>
             <a:pPr algn="l"/>
             <a:r>
-              <a:rPr sz="1100" b="0" i="0">
+              <a:rPr sz="1050" b="0">
                 <a:solidFill>
                   <a:srgbClr val="CCD6FF"/>
                 </a:solidFill>
               </a:rPr>
-              <a:t>Manage users, approve members, post events and announcements</a:t>
-            </a:r>
-          </a:p>
-        </p:txBody>
-      </p:sp>
-      <p:sp>
-        <p:nvSpPr>
-          <p:cNvPr id="39" name="TextBox 38"/>
-          <p:cNvSpPr txBox="1"/>
-          <p:nvPr/>
-        </p:nvSpPr>
-        <p:spPr>
-          <a:xfrm>
-            <a:off x="274320" y="6629400"/>
-            <a:ext cx="5486400" cy="201168"/>
+              <a:t>Approval, payment and order status updates, in one inbox</a:t>
+            </a:r>
+          </a:p>
+        </p:txBody>
+      </p:sp>
+      <p:sp>
+        <p:nvSpPr>
+          <p:cNvPr id="73" name="Rectangle 72"/>
+          <p:cNvSpPr/>
+          <p:nvPr/>
+        </p:nvSpPr>
+        <p:spPr>
+          <a:xfrm>
+            <a:off x="6263640" y="3611879"/>
+            <a:ext cx="5669280" cy="457200"/>
+          </a:xfrm>
+          <a:prstGeom prst="rect">
+            <a:avLst/>
+          </a:prstGeom>
+          <a:solidFill>
+            <a:srgbClr val="222D60"/>
+          </a:solidFill>
+          <a:ln>
+            <a:noFill/>
+          </a:ln>
+          <a:effectLst/>
+        </p:spPr>
+        <p:style>
+          <a:lnRef idx="1">
+            <a:schemeClr val="accent1"/>
+          </a:lnRef>
+          <a:fillRef idx="3">
+            <a:schemeClr val="accent1"/>
+          </a:fillRef>
+          <a:effectRef idx="2">
+            <a:schemeClr val="accent1"/>
+          </a:effectRef>
+          <a:fontRef idx="minor">
+            <a:schemeClr val="lt1"/>
+          </a:fontRef>
+        </p:style>
+        <p:txBody>
+          <a:bodyPr rtlCol="0" anchor="ctr"/>
+          <a:lstStyle/>
+          <a:p>
+            <a:pPr algn="ctr"/>
+          </a:p>
+        </p:txBody>
+      </p:sp>
+      <p:sp>
+        <p:nvSpPr>
+          <p:cNvPr id="74" name="TextBox 73"/>
+          <p:cNvSpPr txBox="1"/>
+          <p:nvPr/>
+        </p:nvSpPr>
+        <p:spPr>
+          <a:xfrm>
+            <a:off x="6355080" y="3657599"/>
+            <a:ext cx="2103120" cy="365760"/>
           </a:xfrm>
           <a:prstGeom prst="rect">
             <a:avLst/>
@@ -14463,12 +15939,158 @@
           <a:p>
             <a:pPr algn="l"/>
             <a:r>
-              <a:rPr sz="800" b="0" i="1">
-                <a:solidFill>
-                  <a:srgbClr val="666688"/>
-                </a:solidFill>
-              </a:rPr>
-              <a:t>Developed by Prayburn Links</a:t>
+              <a:rPr sz="1200" b="1">
+                <a:solidFill>
+                  <a:srgbClr val="C9A03C"/>
+                </a:solidFill>
+              </a:rPr>
+              <a:t>👤 Profile</a:t>
+            </a:r>
+          </a:p>
+        </p:txBody>
+      </p:sp>
+      <p:sp>
+        <p:nvSpPr>
+          <p:cNvPr id="75" name="TextBox 74"/>
+          <p:cNvSpPr txBox="1"/>
+          <p:nvPr/>
+        </p:nvSpPr>
+        <p:spPr>
+          <a:xfrm>
+            <a:off x="8458200" y="3657599"/>
+            <a:ext cx="3383280" cy="365760"/>
+          </a:xfrm>
+          <a:prstGeom prst="rect">
+            <a:avLst/>
+          </a:prstGeom>
+          <a:noFill/>
+        </p:spPr>
+        <p:txBody>
+          <a:bodyPr wrap="square">
+            <a:spAutoFit/>
+          </a:bodyPr>
+          <a:lstStyle/>
+          <a:p>
+            <a:pPr algn="l"/>
+            <a:r>
+              <a:rPr sz="1050" b="0">
+                <a:solidFill>
+                  <a:srgbClr val="CCD6FF"/>
+                </a:solidFill>
+              </a:rPr>
+              <a:t>Member profile, congregation, role, and account settings</a:t>
+            </a:r>
+          </a:p>
+        </p:txBody>
+      </p:sp>
+      <p:sp>
+        <p:nvSpPr>
+          <p:cNvPr id="76" name="Rectangle 75"/>
+          <p:cNvSpPr/>
+          <p:nvPr/>
+        </p:nvSpPr>
+        <p:spPr>
+          <a:xfrm>
+            <a:off x="320040" y="4133087"/>
+            <a:ext cx="5669280" cy="457200"/>
+          </a:xfrm>
+          <a:prstGeom prst="rect">
+            <a:avLst/>
+          </a:prstGeom>
+          <a:solidFill>
+            <a:srgbClr val="222D60"/>
+          </a:solidFill>
+          <a:ln>
+            <a:noFill/>
+          </a:ln>
+          <a:effectLst/>
+        </p:spPr>
+        <p:style>
+          <a:lnRef idx="1">
+            <a:schemeClr val="accent1"/>
+          </a:lnRef>
+          <a:fillRef idx="3">
+            <a:schemeClr val="accent1"/>
+          </a:fillRef>
+          <a:effectRef idx="2">
+            <a:schemeClr val="accent1"/>
+          </a:effectRef>
+          <a:fontRef idx="minor">
+            <a:schemeClr val="lt1"/>
+          </a:fontRef>
+        </p:style>
+        <p:txBody>
+          <a:bodyPr rtlCol="0" anchor="ctr"/>
+          <a:lstStyle/>
+          <a:p>
+            <a:pPr algn="ctr"/>
+          </a:p>
+        </p:txBody>
+      </p:sp>
+      <p:sp>
+        <p:nvSpPr>
+          <p:cNvPr id="77" name="TextBox 76"/>
+          <p:cNvSpPr txBox="1"/>
+          <p:nvPr/>
+        </p:nvSpPr>
+        <p:spPr>
+          <a:xfrm>
+            <a:off x="411480" y="4178807"/>
+            <a:ext cx="2103120" cy="365760"/>
+          </a:xfrm>
+          <a:prstGeom prst="rect">
+            <a:avLst/>
+          </a:prstGeom>
+          <a:noFill/>
+        </p:spPr>
+        <p:txBody>
+          <a:bodyPr wrap="square">
+            <a:spAutoFit/>
+          </a:bodyPr>
+          <a:lstStyle/>
+          <a:p>
+            <a:pPr algn="l"/>
+            <a:r>
+              <a:rPr sz="1200" b="1">
+                <a:solidFill>
+                  <a:srgbClr val="C9A03C"/>
+                </a:solidFill>
+              </a:rPr>
+              <a:t>🛡  Admin Panel</a:t>
+            </a:r>
+          </a:p>
+        </p:txBody>
+      </p:sp>
+      <p:sp>
+        <p:nvSpPr>
+          <p:cNvPr id="78" name="TextBox 77"/>
+          <p:cNvSpPr txBox="1"/>
+          <p:nvPr/>
+        </p:nvSpPr>
+        <p:spPr>
+          <a:xfrm>
+            <a:off x="2514600" y="4178807"/>
+            <a:ext cx="3383280" cy="365760"/>
+          </a:xfrm>
+          <a:prstGeom prst="rect">
+            <a:avLst/>
+          </a:prstGeom>
+          <a:noFill/>
+        </p:spPr>
+        <p:txBody>
+          <a:bodyPr wrap="square">
+            <a:spAutoFit/>
+          </a:bodyPr>
+          <a:lstStyle/>
+          <a:p>
+            <a:pPr algn="l"/>
+            <a:r>
+              <a:rPr sz="1050" b="0">
+                <a:solidFill>
+                  <a:srgbClr val="CCD6FF"/>
+                </a:solidFill>
+              </a:rPr>
+              <a:t>Approve members, review payments &amp; orders, manage merchandise catalog</a:t>
             </a:r>
           </a:p>
         </p:txBody>
@@ -15016,7 +16638,7 @@
                   <a:srgbClr val="555F7A"/>
                 </a:solidFill>
               </a:rPr>
-              <a:t>One tap to Events, Giving, Prayer Wall, and Media from the hero area.</a:t>
+              <a:t>One tap to Give &amp; Tithe, Districts, Prayer Wall, and Store from the hero area.</a:t>
             </a:r>
           </a:p>
         </p:txBody>
